--- a/presentation/tynys_project_12slides_kz.pptx
+++ b/presentation/tynys_project_12slides_kz.pptx
@@ -2,24 +2,24 @@
 <file path=ppt/presentation.xml><?xml version="1.0" encoding="utf-8"?>
 <p:presentation xmlns:p="http://schemas.openxmlformats.org/presentationml/2006/main">
   <p:sldMasterIdLst>
-    <p:sldMasterId xmlns:r="http://schemas.openxmlformats.org/officeDocument/2006/relationships" id="2147483648" r:id="R61b9461495d34f42"/>
+    <p:sldMasterId xmlns:r="http://schemas.openxmlformats.org/officeDocument/2006/relationships" id="2147483648" r:id="Rf6ca39ad066a4f2e"/>
   </p:sldMasterIdLst>
   <p:notesMasterIdLst>
-    <p:notesMasterId xmlns:r="http://schemas.openxmlformats.org/officeDocument/2006/relationships" r:id="R808ec985136e4789"/>
+    <p:notesMasterId xmlns:r="http://schemas.openxmlformats.org/officeDocument/2006/relationships" r:id="R7296dc908b164706"/>
   </p:notesMasterIdLst>
   <p:sldIdLst>
-    <p:sldId xmlns:r="http://schemas.openxmlformats.org/officeDocument/2006/relationships" id="256" r:id="Ra63782b7cfd44f4f"/>
-    <p:sldId xmlns:r="http://schemas.openxmlformats.org/officeDocument/2006/relationships" id="257" r:id="R0c1a7e57f9c542a4"/>
-    <p:sldId xmlns:r="http://schemas.openxmlformats.org/officeDocument/2006/relationships" id="258" r:id="R0c9593387ab04aa9"/>
-    <p:sldId xmlns:r="http://schemas.openxmlformats.org/officeDocument/2006/relationships" id="259" r:id="R031a71137ae544dd"/>
-    <p:sldId xmlns:r="http://schemas.openxmlformats.org/officeDocument/2006/relationships" id="260" r:id="R02438320ce234f24"/>
-    <p:sldId xmlns:r="http://schemas.openxmlformats.org/officeDocument/2006/relationships" id="261" r:id="R32989a48699a4267"/>
-    <p:sldId xmlns:r="http://schemas.openxmlformats.org/officeDocument/2006/relationships" id="262" r:id="R9b1aacb8997f46bf"/>
-    <p:sldId xmlns:r="http://schemas.openxmlformats.org/officeDocument/2006/relationships" id="263" r:id="R2ccaf381820d4aaf"/>
-    <p:sldId xmlns:r="http://schemas.openxmlformats.org/officeDocument/2006/relationships" id="264" r:id="Rdc25e25c3b254a51"/>
-    <p:sldId xmlns:r="http://schemas.openxmlformats.org/officeDocument/2006/relationships" id="265" r:id="R95ce96c8c5bc4118"/>
-    <p:sldId xmlns:r="http://schemas.openxmlformats.org/officeDocument/2006/relationships" id="266" r:id="R437df4735dd74df2"/>
-    <p:sldId xmlns:r="http://schemas.openxmlformats.org/officeDocument/2006/relationships" id="267" r:id="R3aedf8202c3c4117"/>
+    <p:sldId xmlns:r="http://schemas.openxmlformats.org/officeDocument/2006/relationships" id="256" r:id="R00e62bdc6d2d430e"/>
+    <p:sldId xmlns:r="http://schemas.openxmlformats.org/officeDocument/2006/relationships" id="257" r:id="R8fb2e52f4532441d"/>
+    <p:sldId xmlns:r="http://schemas.openxmlformats.org/officeDocument/2006/relationships" id="258" r:id="R07ada17e20604cff"/>
+    <p:sldId xmlns:r="http://schemas.openxmlformats.org/officeDocument/2006/relationships" id="259" r:id="Rb0145468882841eb"/>
+    <p:sldId xmlns:r="http://schemas.openxmlformats.org/officeDocument/2006/relationships" id="260" r:id="R7d3882c1225c4a84"/>
+    <p:sldId xmlns:r="http://schemas.openxmlformats.org/officeDocument/2006/relationships" id="261" r:id="R2ed3aaad64a849cf"/>
+    <p:sldId xmlns:r="http://schemas.openxmlformats.org/officeDocument/2006/relationships" id="262" r:id="R68d10881bedf408b"/>
+    <p:sldId xmlns:r="http://schemas.openxmlformats.org/officeDocument/2006/relationships" id="263" r:id="Rad21329a70424b60"/>
+    <p:sldId xmlns:r="http://schemas.openxmlformats.org/officeDocument/2006/relationships" id="264" r:id="Rcda2d06ea15f4c22"/>
+    <p:sldId xmlns:r="http://schemas.openxmlformats.org/officeDocument/2006/relationships" id="265" r:id="R7fbb8ef651184338"/>
+    <p:sldId xmlns:r="http://schemas.openxmlformats.org/officeDocument/2006/relationships" id="266" r:id="R46d79641aa1b4ead"/>
+    <p:sldId xmlns:r="http://schemas.openxmlformats.org/officeDocument/2006/relationships" id="267" r:id="Re278e2e6f8624623"/>
   </p:sldIdLst>
   <p:sldSz cx="12192000" cy="6858000"/>
   <p:notesSz cx="6858000" cy="9144000"/>
@@ -453,7 +453,7 @@
           <a:lstStyle xmlns:a="http://schemas.openxmlformats.org/drawingml/2006/main"/>
           <a:p xmlns:a="http://schemas.openxmlformats.org/drawingml/2006/main">
             <a:r>
-              <a:t>Жобамның атауы — Tynys. Ол өкпе рентгенін NORMAL және PNEUMONIA санаттарына жіктейді. TensorFlow және Keras арқылы CNN мен MobileNetV2 үйретіп, қазақша сайтқа қостым. Қазір жоба суретті талдау, модельдерді салыстыру және есеп жүктеу мүмкіндіктерін қамтиды.</a:t>
+              <a:t>Tynys өкпе рентгенін NORMAL және PNEUMONIA санаттарына жіктейді. CNN мен MobileNetV2-ні TensorFlow/Keras арқылы үйретіп, қазақша сайтқа қостым. Қазір validation калибрлеуі мен OOD ескертуі де іске қосылды.</a:t>
             </a:r>
           </a:p>
           <a:p xmlns:a="http://schemas.openxmlformats.org/drawingml/2006/main">
@@ -463,7 +463,7 @@
           </a:p>
           <a:p xmlns:a="http://schemas.openxmlformats.org/drawingml/2006/main">
             <a:r>
-              <a:t>Дереккөздер: site/model/test_metrics.csv; site/model/mcnemar.json; training/external_validation_metrics.csv; training/IMPLEMENTATION_STATUS.json. OpenI: https://openi.nlm.nih.gov/api/search?query=pneumonia&amp;m=1&amp;n=1&amp;coll=cxr . Бастапқы датасет: https://www.kaggle.com/datasets/paultimothymooney/chest-xray-pneumonia</a:t>
+              <a:t>Дереккөздер: site/model/model_config.json; test_metrics.csv; mcnemar.json; external_validation.json; training/calibration_report.json.</a:t>
             </a:r>
           </a:p>
         </p:txBody>
@@ -533,7 +533,7 @@
           <a:lstStyle xmlns:a="http://schemas.openxmlformats.org/drawingml/2006/main"/>
           <a:p xmlns:a="http://schemas.openxmlformats.org/drawingml/2006/main">
             <a:r>
-              <a:t>Жаңа нұсқада CR/DX DICOM, unit және интеграциялық тесттер, CI, Docker конфигурациясы бар. 34 жергілікті тест өтті. Docker қызметі қосылмағандықтан контейнерді тексере алмадым. Калибрлеу мен OOD коды дайын, бірақ толық validation параметрлері әлі есептелмеген. Көп ауруға арналған multi-label — келесі бөлек эксперимент.</a:t>
+              <a:t>Калибрлеу, OOD және DICOM жұмыс істейді, 40 тест өтті. Docker конфигурациясы бар, бірақ daemon өшірулі болғандықтан контейнер тексерілмеді. Келесі кезең — ensemble, кейін multi-label жеке эксперименті.</a:t>
             </a:r>
           </a:p>
           <a:p xmlns:a="http://schemas.openxmlformats.org/drawingml/2006/main">
@@ -543,7 +543,7 @@
           </a:p>
           <a:p xmlns:a="http://schemas.openxmlformats.org/drawingml/2006/main">
             <a:r>
-              <a:t>Дереккөздер: site/model/test_metrics.csv; site/model/mcnemar.json; training/external_validation_metrics.csv; training/IMPLEMENTATION_STATUS.json. OpenI: https://openi.nlm.nih.gov/api/search?query=pneumonia&amp;m=1&amp;n=1&amp;coll=cxr . Бастапқы датасет: https://www.kaggle.com/datasets/paultimothymooney/chest-xray-pneumonia</a:t>
+              <a:t>Дереккөздер: site/model/model_config.json; test_metrics.csv; mcnemar.json; external_validation.json; training/calibration_report.json.</a:t>
             </a:r>
           </a:p>
         </p:txBody>
@@ -613,7 +613,7 @@
           <a:lstStyle xmlns:a="http://schemas.openxmlformats.org/drawingml/2006/main"/>
           <a:p xmlns:a="http://schemas.openxmlformats.org/drawingml/2006/main">
             <a:r>
-              <a:t>OpenI-ден 200 суретті сыртқы тестке алдым: 160 NORMAL, 40 PNEUMONIA. Бір есептен бір сурет таңдап, SHA-256-ны ішкі жиындармен салыстырдым, қиылысу табылмады. Шек өзгерген жоқ. Accuracy 55%, recall 57,50%, ROC-AUC 0,5442 болды. Бұл ішкі нәтиженің басқа деректе қайталанбағанын көрсетеді. Топтау есеп ID-імен жасалды, нақты пациент сәйкестігі толық расталмаған. MeSH белгілері де клиникалық gold standard емес.</a:t>
+              <a:t>OpenI-дің сол 200 суретін жаңа калибрленген балл және 0,745 шегімен қайта бағаладым. Accuracy 55,00%, recall 57,50%, AUC 0,5442. Таңдау мен шекті сыртқы белгілерге қарап өзгерткен жоқпын. Report UID — surrogate топ, нақты пациент ID толық расталмаған.</a:t>
             </a:r>
           </a:p>
           <a:p xmlns:a="http://schemas.openxmlformats.org/drawingml/2006/main">
@@ -623,7 +623,7 @@
           </a:p>
           <a:p xmlns:a="http://schemas.openxmlformats.org/drawingml/2006/main">
             <a:r>
-              <a:t>Дереккөздер: site/model/test_metrics.csv; site/model/mcnemar.json; training/external_validation_metrics.csv; training/IMPLEMENTATION_STATUS.json. OpenI: https://openi.nlm.nih.gov/api/search?query=pneumonia&amp;m=1&amp;n=1&amp;coll=cxr . Бастапқы датасет: https://www.kaggle.com/datasets/paultimothymooney/chest-xray-pneumonia</a:t>
+              <a:t>Дереккөздер: site/model/model_config.json; test_metrics.csv; mcnemar.json; external_validation.json; training/calibration_report.json.</a:t>
             </a:r>
           </a:p>
         </p:txBody>
@@ -693,7 +693,7 @@
           <a:lstStyle xmlns:a="http://schemas.openxmlformats.org/drawingml/2006/main"/>
           <a:p xmlns:a="http://schemas.openxmlformats.org/drawingml/2006/main">
             <a:r>
-              <a:t>Temperature scaling T коэффициентін validation NLL арқылы таңдайды, кейін шешім шегі де сол validation-да қайта таңдалады. OOD validation белгілерінің Махаланобис қашықтығына сүйенеді және болжамды блоктамайды. Бастапқы 952 файлдың 312-сі жүктелгенде желі тайм-ауты болды. Сондықтан T немесе OOD параметрлерін ойдан енгізбедім. Қазір T=1, OOD қолжетімсіз. Қайта жалғастыру командалары README-де берілген.</a:t>
+              <a:t>952 validation файлының бәрі SHA-256 бойынша тексерілді. MobileNetV2 T=0,97996, CNN T=0,68203. OOD 1280 белгі мен covariance арқылы есептелді, 95-процентиль шегі 26,3409. Non-X-ray сапасы бөлек тексерілген жоқ. Бұл оқу прототипі, клиникалық қолдануға бөлек тексеру қажет.</a:t>
             </a:r>
           </a:p>
           <a:p xmlns:a="http://schemas.openxmlformats.org/drawingml/2006/main">
@@ -703,7 +703,7 @@
           </a:p>
           <a:p xmlns:a="http://schemas.openxmlformats.org/drawingml/2006/main">
             <a:r>
-              <a:t>Дереккөздер: site/model/test_metrics.csv; site/model/mcnemar.json; training/external_validation_metrics.csv; training/IMPLEMENTATION_STATUS.json. OpenI: https://openi.nlm.nih.gov/api/search?query=pneumonia&amp;m=1&amp;n=1&amp;coll=cxr . Бастапқы датасет: https://www.kaggle.com/datasets/paultimothymooney/chest-xray-pneumonia</a:t>
+              <a:t>Дереккөздер: site/model/model_config.json; test_metrics.csv; mcnemar.json; external_validation.json; training/calibration_report.json.</a:t>
             </a:r>
           </a:p>
         </p:txBody>
@@ -773,7 +773,7 @@
           <a:lstStyle xmlns:a="http://schemas.openxmlformats.org/drawingml/2006/main"/>
           <a:p xmlns:a="http://schemas.openxmlformats.org/drawingml/2006/main">
             <a:r>
-              <a:t>Жобаның мәселесі — рентгенді бастапқы сұрыптауға қолдау қажеттілігі. Мақсаты — екі санатты жіктеу моделін сайт арқылы қолдану. Бұл бинарлық классификация. Мамандардың уақытын үнемдеу көзделеді, бірақ клиникадағы әсерін өлшеген жоқпын.</a:t>
+              <a:t>Мәселе — рентгенді бастапқы сұрыптауға қолдау қажеттілігі. Мақсат — екі санатты классификация моделін ыңғайлы сайт арқылы қолдану. Клиникада маман уақытын қаншалықты үнемдейтінін өлшеген жоқпын.</a:t>
             </a:r>
           </a:p>
           <a:p xmlns:a="http://schemas.openxmlformats.org/drawingml/2006/main">
@@ -783,7 +783,7 @@
           </a:p>
           <a:p xmlns:a="http://schemas.openxmlformats.org/drawingml/2006/main">
             <a:r>
-              <a:t>Дереккөздер: site/model/test_metrics.csv; site/model/mcnemar.json; training/external_validation_metrics.csv; training/IMPLEMENTATION_STATUS.json. OpenI: https://openi.nlm.nih.gov/api/search?query=pneumonia&amp;m=1&amp;n=1&amp;coll=cxr . Бастапқы датасет: https://www.kaggle.com/datasets/paultimothymooney/chest-xray-pneumonia</a:t>
+              <a:t>Дереккөздер: site/model/model_config.json; test_metrics.csv; mcnemar.json; external_validation.json; training/calibration_report.json.</a:t>
             </a:r>
           </a:p>
         </p:txBody>
@@ -853,7 +853,7 @@
           <a:lstStyle xmlns:a="http://schemas.openxmlformats.org/drawingml/2006/main"/>
           <a:p xmlns:a="http://schemas.openxmlformats.org/drawingml/2006/main">
             <a:r>
-              <a:t>Kaggle датасетінен 5856 жарамды сурет оқылды. Тазалаудан кейін train 3801, validation 952, test 618 сурет қалды. Жиындар арасындағы SHA-256 көшірмелерін және файл атауынан алынған топтарды тексердім. Бұл топтар ресми пациент ID емес.</a:t>
+              <a:t>5856 жарамды суретті тазалағаннан кейін train 3801, validation 952, test 618 сурет қалды. Көшірмелерді SHA-256 және файл атауынан алынған топтармен тексердім. Бұл топтар ресми пациент ID емес.</a:t>
             </a:r>
           </a:p>
           <a:p xmlns:a="http://schemas.openxmlformats.org/drawingml/2006/main">
@@ -863,7 +863,7 @@
           </a:p>
           <a:p xmlns:a="http://schemas.openxmlformats.org/drawingml/2006/main">
             <a:r>
-              <a:t>Дереккөздер: site/model/test_metrics.csv; site/model/mcnemar.json; training/external_validation_metrics.csv; training/IMPLEMENTATION_STATUS.json. OpenI: https://openi.nlm.nih.gov/api/search?query=pneumonia&amp;m=1&amp;n=1&amp;coll=cxr . Бастапқы датасет: https://www.kaggle.com/datasets/paultimothymooney/chest-xray-pneumonia</a:t>
+              <a:t>Дереккөздер: site/model/model_config.json; test_metrics.csv; mcnemar.json; external_validation.json; training/calibration_report.json.</a:t>
             </a:r>
           </a:p>
         </p:txBody>
@@ -933,7 +933,7 @@
           <a:lstStyle xmlns:a="http://schemas.openxmlformats.org/drawingml/2006/main"/>
           <a:p xmlns:a="http://schemas.openxmlformats.org/drawingml/2006/main">
             <a:r>
-              <a:t>CNN белгілерді осы деректерден басынан үйренеді. MobileNetV2 ImageNet салмақтарынан бастап бейімделеді. Суретті үш арнамен оқып, float32 түрінде пропорциясын сақтап 224-ке 224 өлшемге келтіреміз. Сырттан нормализация қоспаймыз. FastAPI серверінде Colab-пен бірдей модель мен өңдеу жұмыс істейді.</a:t>
+              <a:t>CNN белгілерді басынан үйренеді. MobileNetV2 ImageNet салмақтарына сүйенеді. Кіріс бұрынғыдай RGB, float32 және resize_with_pad 224×224. Жаңа validation шектері CNN үшін 0,475, MobileNetV2 үшін 0,745. Сыртқы нормализация қосылған жоқ.</a:t>
             </a:r>
           </a:p>
           <a:p xmlns:a="http://schemas.openxmlformats.org/drawingml/2006/main">
@@ -943,7 +943,7 @@
           </a:p>
           <a:p xmlns:a="http://schemas.openxmlformats.org/drawingml/2006/main">
             <a:r>
-              <a:t>Дереккөздер: site/model/test_metrics.csv; site/model/mcnemar.json; training/external_validation_metrics.csv; training/IMPLEMENTATION_STATUS.json. OpenI: https://openi.nlm.nih.gov/api/search?query=pneumonia&amp;m=1&amp;n=1&amp;coll=cxr . Бастапқы датасет: https://www.kaggle.com/datasets/paultimothymooney/chest-xray-pneumonia</a:t>
+              <a:t>Дереккөздер: site/model/model_config.json; test_metrics.csv; mcnemar.json; external_validation.json; training/calibration_report.json.</a:t>
             </a:r>
           </a:p>
         </p:txBody>
@@ -1013,7 +1013,7 @@
           <a:lstStyle xmlns:a="http://schemas.openxmlformats.org/drawingml/2006/main"/>
           <a:p xmlns:a="http://schemas.openxmlformats.org/drawingml/2006/main">
             <a:r>
-              <a:t>Нейрондық желі сурет белгілерін шығарып, sigmoid арқылы нөл мен бір арасындағы баллды есептейді. Балл 0,740 шегінен жоғары немесе тең болса PNEUMONIA болжамын береді. Мысалда 0,80 осы шектен жоғары. Үйрету кезінде binary cross-entropy қатесі азаяды. Бұл балл клиникалық сенімділік пайызы емес.</a:t>
+              <a:t>Модель sigmoid арқылы raw балл шығарады. Оны sigmoid(logit(raw)/T) арқылы калибрлейміз. Шартты raw 0,80 болса, p_cal шамамен 0,804, ол 0,745 шегінен жоғары, сондықтан PNEUMONIA. Binary cross-entropy формуласы үйретудегі raw баллға қатысты.</a:t>
             </a:r>
           </a:p>
           <a:p xmlns:a="http://schemas.openxmlformats.org/drawingml/2006/main">
@@ -1023,7 +1023,7 @@
           </a:p>
           <a:p xmlns:a="http://schemas.openxmlformats.org/drawingml/2006/main">
             <a:r>
-              <a:t>Дереккөздер: site/model/test_metrics.csv; site/model/mcnemar.json; training/external_validation_metrics.csv; training/IMPLEMENTATION_STATUS.json. OpenI: https://openi.nlm.nih.gov/api/search?query=pneumonia&amp;m=1&amp;n=1&amp;coll=cxr . Бастапқы датасет: https://www.kaggle.com/datasets/paultimothymooney/chest-xray-pneumonia</a:t>
+              <a:t>Дереккөздер: site/model/model_config.json; test_metrics.csv; mcnemar.json; external_validation.json; training/calibration_report.json.</a:t>
             </a:r>
           </a:p>
         </p:txBody>
@@ -1093,7 +1093,7 @@
           <a:lstStyle xmlns:a="http://schemas.openxmlformats.org/drawingml/2006/main"/>
           <a:p xmlns:a="http://schemas.openxmlformats.org/drawingml/2006/main">
             <a:r>
-              <a:t>Ішкі тестте CNN accuracy 71,68%, MobileNetV2 accuracy 89,16% көрсетті. MobileNetV2 recall 96,12%, 15 false negative және 52 false positive бар. 90% accuracy мақсатына жетпеді. Жұптық McNemar тестінде CNN ғана дұрыс тапқан 20, MobileNetV2 ғана дұрыс тапқан 128 сурет бар. p шамамен 1,80 көбейтілген онның минус жиырмасыншы дәрежесі. Айырма осы тестте статистикалық маңызды.</a:t>
+              <a:t>Қазіргі калибрленген test: CNN accuracy 71,52%, MobileNetV2 89,16%. MobileNetV2 recall 96,12%, FN 15, FP 52. 90% мақсатына жетпеді. McNemar: CNN-only 19, MobileNetV2-only 128, p=4,83×10⁻²¹.</a:t>
             </a:r>
           </a:p>
           <a:p xmlns:a="http://schemas.openxmlformats.org/drawingml/2006/main">
@@ -1103,7 +1103,7 @@
           </a:p>
           <a:p xmlns:a="http://schemas.openxmlformats.org/drawingml/2006/main">
             <a:r>
-              <a:t>Дереккөздер: site/model/test_metrics.csv; site/model/mcnemar.json; training/external_validation_metrics.csv; training/IMPLEMENTATION_STATUS.json. OpenI: https://openi.nlm.nih.gov/api/search?query=pneumonia&amp;m=1&amp;n=1&amp;coll=cxr . Бастапқы датасет: https://www.kaggle.com/datasets/paultimothymooney/chest-xray-pneumonia</a:t>
+              <a:t>Дереккөздер: site/model/model_config.json; test_metrics.csv; mcnemar.json; external_validation.json; training/calibration_report.json.</a:t>
             </a:r>
           </a:p>
         </p:txBody>
@@ -1173,7 +1173,7 @@
           <a:lstStyle xmlns:a="http://schemas.openxmlformats.org/drawingml/2006/main"/>
           <a:p xmlns:a="http://schemas.openxmlformats.org/drawingml/2006/main">
             <a:r>
-              <a:t>Бір суретті екі модель тексереді. Сайт әр модельдің санатын, баллын және өз шешім шегін көрсетеді. Бір топта 10 файлға дейін, әр файл 12 мегабайтқа дейін жүктеуге болады. JPG, PNG және CR/DX DICOM қолданылады. CT/MR файлдарын сервер қабылдамайды.</a:t>
+              <a:t>Сайт бір суретке екі модельдің калибрленген баллын, санатын және өз шегін көрсетеді. JPG, PNG, CR/DX DICOM қолданылады. Бір топта 10 файлға дейін, әрқайсысы 12 МБ-қа дейін. CT/MR қабылданбайды.</a:t>
             </a:r>
           </a:p>
           <a:p xmlns:a="http://schemas.openxmlformats.org/drawingml/2006/main">
@@ -1183,7 +1183,7 @@
           </a:p>
           <a:p xmlns:a="http://schemas.openxmlformats.org/drawingml/2006/main">
             <a:r>
-              <a:t>Дереккөздер: site/model/test_metrics.csv; site/model/mcnemar.json; training/external_validation_metrics.csv; training/IMPLEMENTATION_STATUS.json. OpenI: https://openi.nlm.nih.gov/api/search?query=pneumonia&amp;m=1&amp;n=1&amp;coll=cxr . Бастапқы датасет: https://www.kaggle.com/datasets/paultimothymooney/chest-xray-pneumonia</a:t>
+              <a:t>Дереккөздер: site/model/model_config.json; test_metrics.csv; mcnemar.json; external_validation.json; training/calibration_report.json.</a:t>
             </a:r>
           </a:p>
         </p:txBody>
@@ -1253,7 +1253,7 @@
           <a:lstStyle xmlns:a="http://schemas.openxmlformats.org/drawingml/2006/main"/>
           <a:p xmlns:a="http://schemas.openxmlformats.org/drawingml/2006/main">
             <a:r>
-              <a:t>Grad-CAM модельдің таңдаған санатына ықпал еткен аймақтарды түспен көрсетеді. Түпнұсқамен ауыстырып қарап, белгіленген PNG жүктеуге болады. Карта зақымның нақты шекарасы емес. Калибрлеу қосылса да Grad-CAM басының сәйкестігін raw sigmoid баллымен тексереміз.</a:t>
+              <a:t>Grad-CAM таңдалған санатқа ықпал еткен аймақтарды жуық көрсетеді. Оның reconstructed_score мәні калибрленген емес, raw sigmoid-пен салыстырылады. Карта зақым шекарасы емес. OOD тек ескерту береді, болжамды блоктамайды.</a:t>
             </a:r>
           </a:p>
           <a:p xmlns:a="http://schemas.openxmlformats.org/drawingml/2006/main">
@@ -1263,7 +1263,7 @@
           </a:p>
           <a:p xmlns:a="http://schemas.openxmlformats.org/drawingml/2006/main">
             <a:r>
-              <a:t>Дереккөздер: site/model/test_metrics.csv; site/model/mcnemar.json; training/external_validation_metrics.csv; training/IMPLEMENTATION_STATUS.json. OpenI: https://openi.nlm.nih.gov/api/search?query=pneumonia&amp;m=1&amp;n=1&amp;coll=cxr . Бастапқы датасет: https://www.kaggle.com/datasets/paultimothymooney/chest-xray-pneumonia</a:t>
+              <a:t>Дереккөздер: site/model/model_config.json; test_metrics.csv; mcnemar.json; external_validation.json; training/calibration_report.json.</a:t>
             </a:r>
           </a:p>
         </p:txBody>
@@ -1333,7 +1333,7 @@
           <a:lstStyle xmlns:a="http://schemas.openxmlformats.org/drawingml/2006/main"/>
           <a:p xmlns:a="http://schemas.openxmlformats.org/drawingml/2006/main">
             <a:r>
-              <a:t>PDF және мәтіндік есепте санат, балл, шек, екі модельдің салыстыруы беріледі. PDF түпнұсқа мен Grad-CAM-ды қатар көрсетеді. OOD ескертуі бар болса PDF-ке де кіреді. Тарих соңғы 20 талдауды осы бет жадында сақтайды. Бетті жаңартқанда немесе тазалағанда жойылады.</a:t>
+              <a:t>PDF түпнұсқа, Grad-CAM, T, шешім шегі және салыстыруды көрсетеді. OOD ескертуі де кіреді. NORMAL мен PNEUMONIA беттерінің бір параққа сыйуын тексердім. Тарих тек бет жадында, жаңартқанда жойылады.</a:t>
             </a:r>
           </a:p>
           <a:p xmlns:a="http://schemas.openxmlformats.org/drawingml/2006/main">
@@ -1343,7 +1343,7 @@
           </a:p>
           <a:p xmlns:a="http://schemas.openxmlformats.org/drawingml/2006/main">
             <a:r>
-              <a:t>Дереккөздер: site/model/test_metrics.csv; site/model/mcnemar.json; training/external_validation_metrics.csv; training/IMPLEMENTATION_STATUS.json. OpenI: https://openi.nlm.nih.gov/api/search?query=pneumonia&amp;m=1&amp;n=1&amp;coll=cxr . Бастапқы датасет: https://www.kaggle.com/datasets/paultimothymooney/chest-xray-pneumonia</a:t>
+              <a:t>Дереккөздер: site/model/model_config.json; test_metrics.csv; mcnemar.json; external_validation.json; training/calibration_report.json.</a:t>
             </a:r>
           </a:p>
         </p:txBody>
@@ -3156,12 +3156,12 @@
   </p:cSld>
   <p:clrMap bg1="lt1" tx1="dk1" bg2="lt2" tx2="dk2" accent1="accent1" accent2="accent2" accent3="accent3" accent4="accent4" accent5="accent5" accent6="accent6" hlink="hlink" folHlink="folHlink"/>
   <p:sldLayoutIdLst>
-    <p:sldLayoutId xmlns:r="http://schemas.openxmlformats.org/officeDocument/2006/relationships" id="2147483649" r:id="Raf964ad1409349c1"/>
-    <p:sldLayoutId xmlns:r="http://schemas.openxmlformats.org/officeDocument/2006/relationships" id="2147483650" r:id="Ra70fe6ae048940f4"/>
-    <p:sldLayoutId xmlns:r="http://schemas.openxmlformats.org/officeDocument/2006/relationships" id="2147483651" r:id="R37e662867b3e42ca"/>
-    <p:sldLayoutId xmlns:r="http://schemas.openxmlformats.org/officeDocument/2006/relationships" id="2147483652" r:id="Rc205cd9a4ebe46b8"/>
-    <p:sldLayoutId xmlns:r="http://schemas.openxmlformats.org/officeDocument/2006/relationships" id="2147483653" r:id="R77a54fa643e242c3"/>
-    <p:sldLayoutId xmlns:r="http://schemas.openxmlformats.org/officeDocument/2006/relationships" id="2147483654" r:id="Rc295db52a98748c5"/>
+    <p:sldLayoutId xmlns:r="http://schemas.openxmlformats.org/officeDocument/2006/relationships" id="2147483649" r:id="Rc85075be2c11472a"/>
+    <p:sldLayoutId xmlns:r="http://schemas.openxmlformats.org/officeDocument/2006/relationships" id="2147483650" r:id="R5587874fa2774627"/>
+    <p:sldLayoutId xmlns:r="http://schemas.openxmlformats.org/officeDocument/2006/relationships" id="2147483651" r:id="R09ca4ece41bd4c65"/>
+    <p:sldLayoutId xmlns:r="http://schemas.openxmlformats.org/officeDocument/2006/relationships" id="2147483652" r:id="R8575af8970684e9d"/>
+    <p:sldLayoutId xmlns:r="http://schemas.openxmlformats.org/officeDocument/2006/relationships" id="2147483653" r:id="Rbd6d5d0273f141ef"/>
+    <p:sldLayoutId xmlns:r="http://schemas.openxmlformats.org/officeDocument/2006/relationships" id="2147483654" r:id="R84beafb5e8774597"/>
   </p:sldLayoutIdLst>
   <p:txStyles>
     <p:titleStyle>
@@ -3781,7 +3781,7 @@
           <p:cNvPr id="2" name="">
             <a:extLst xmlns:a="http://schemas.openxmlformats.org/drawingml/2006/main">
               <a:ext uri="{FF2B5EF4-FFF2-40B4-BE49-F238E27FC236}">
-                <a16:creationId xmlns:a16="http://schemas.microsoft.com/office/drawing/2014/main" id="{D910C2E2-2A37-4DEB-8A01-8D1A9CF5DAEF}"/>
+                <a16:creationId xmlns:a16="http://schemas.microsoft.com/office/drawing/2014/main" id="{1AB3641E-C9A6-406B-9F15-6250F535801F}"/>
               </a:ext>
             </a:extLst>
           </p:cNvPr>
@@ -3791,7 +3791,7 @@
           <p:nvPr/>
         </p:nvPicPr>
         <p:blipFill>
-          <a:blip xmlns:r="http://schemas.openxmlformats.org/officeDocument/2006/relationships" xmlns:a="http://schemas.openxmlformats.org/drawingml/2006/main" r:embed="R1f05dab6c4274fbe"/>
+          <a:blip xmlns:r="http://schemas.openxmlformats.org/officeDocument/2006/relationships" xmlns:a="http://schemas.openxmlformats.org/drawingml/2006/main" r:embed="R7dce5e7ed50b4d6c"/>
           <a:stretch xmlns:a="http://schemas.openxmlformats.org/drawingml/2006/main"/>
         </p:blipFill>
         <p:spPr>
@@ -4407,7 +4407,7 @@
                 <a:ea typeface="Arial"/>
                 <a:cs typeface="Arial"/>
               </a:rPr>
-              <a:t>34 тест және CI</a:t>
+              <a:t>Калибрлеу және OOD</a:t>
             </a:r>
           </a:p>
           <a:p xmlns:a="http://schemas.openxmlformats.org/drawingml/2006/main">
@@ -4431,7 +4431,7 @@
                 <a:ea typeface="Arial"/>
                 <a:cs typeface="Arial"/>
               </a:rPr>
-              <a:t>Docker конфигурациясы</a:t>
+              <a:t>40 тест және CI</a:t>
             </a:r>
           </a:p>
           <a:p xmlns:a="http://schemas.openxmlformats.org/drawingml/2006/main">
@@ -4593,7 +4593,7 @@
                 <a:ea typeface="Arial"/>
                 <a:cs typeface="Arial"/>
               </a:rPr>
-              <a:t>Validation толық жүктеу</a:t>
+              <a:t>Ensemble дайындау</a:t>
             </a:r>
           </a:p>
           <a:p xmlns:a="http://schemas.openxmlformats.org/drawingml/2006/main">
@@ -4617,31 +4617,7 @@
                 <a:ea typeface="Arial"/>
                 <a:cs typeface="Arial"/>
               </a:rPr>
-              <a:t>Калибрлеу және OOD есептеу</a:t>
-            </a:r>
-          </a:p>
-          <a:p xmlns:a="http://schemas.openxmlformats.org/drawingml/2006/main">
-            <a:pPr>
-              <a:buNone/>
-              <a:defRPr sz="2175" b="0">
-                <a:solidFill>
-                  <a:srgbClr val="FFFFFF"/>
-                </a:solidFill>
-                <a:latin typeface="Arial"/>
-                <a:ea typeface="Arial"/>
-                <a:cs typeface="Arial"/>
-              </a:defRPr>
-            </a:pPr>
-            <a:r>
-              <a:rPr sz="2175" b="0">
-                <a:solidFill>
-                  <a:srgbClr val="FFFFFF"/>
-                </a:solidFill>
-                <a:latin typeface="Arial"/>
-                <a:ea typeface="Arial"/>
-                <a:cs typeface="Arial"/>
-              </a:rPr>
-              <a:t>Multi-label тәжірибесі</a:t>
+              <a:t>Multi-label жеке тәжірибесі</a:t>
             </a:r>
           </a:p>
           <a:p xmlns:a="http://schemas.openxmlformats.org/drawingml/2006/main">
@@ -4666,6 +4642,30 @@
                 <a:cs typeface="Arial"/>
               </a:rPr>
               <a:t>Клиникалық сыртқы тексеру</a:t>
+            </a:r>
+          </a:p>
+          <a:p xmlns:a="http://schemas.openxmlformats.org/drawingml/2006/main">
+            <a:pPr>
+              <a:buNone/>
+              <a:defRPr sz="2175" b="0">
+                <a:solidFill>
+                  <a:srgbClr val="FFFFFF"/>
+                </a:solidFill>
+                <a:latin typeface="Arial"/>
+                <a:ea typeface="Arial"/>
+                <a:cs typeface="Arial"/>
+              </a:defRPr>
+            </a:pPr>
+            <a:r>
+              <a:rPr sz="2175" b="0">
+                <a:solidFill>
+                  <a:srgbClr val="FFFFFF"/>
+                </a:solidFill>
+                <a:latin typeface="Arial"/>
+                <a:ea typeface="Arial"/>
+                <a:cs typeface="Arial"/>
+              </a:rPr>
+              <a:t>Серверге орналастыру</a:t>
             </a:r>
           </a:p>
         </p:txBody>
@@ -4882,6 +4882,7 @@
           </a:lstStyle>
           <a:p xmlns:a="http://schemas.openxmlformats.org/drawingml/2006/main">
             <a:pPr>
+              <a:buNone/>
               <a:defRPr sz="3225" b="1">
                 <a:solidFill>
                   <a:srgbClr val="193E3A"/>
@@ -4950,6 +4951,7 @@
           </a:lstStyle>
           <a:p xmlns:a="http://schemas.openxmlformats.org/drawingml/2006/main">
             <a:pPr>
+              <a:buNone/>
               <a:defRPr sz="1275" b="0">
                 <a:solidFill>
                   <a:srgbClr val="617C77"/>
@@ -4978,7 +4980,7 @@
           <p:cNvPr id="3" name="">
             <a:extLst xmlns:a="http://schemas.openxmlformats.org/drawingml/2006/main">
               <a:ext uri="{FF2B5EF4-FFF2-40B4-BE49-F238E27FC236}">
-                <a16:creationId xmlns:a16="http://schemas.microsoft.com/office/drawing/2014/main" id="{9C5DF348-31E2-4F1C-A003-2791CA6557F1}"/>
+                <a16:creationId xmlns:a16="http://schemas.microsoft.com/office/drawing/2014/main" id="{BD0058B4-7E87-4BBD-9361-061C11EEF629}"/>
               </a:ext>
             </a:extLst>
           </p:cNvPr>
@@ -4987,7 +4989,7 @@
         </p:nvGraphicFramePr>
         <p:xfrm>
           <a:off xmlns:a="http://schemas.openxmlformats.org/drawingml/2006/main" x="609600" y="1714500"/>
-          <a:ext xmlns:a="http://schemas.openxmlformats.org/drawingml/2006/main" cx="10972800" cy="3105150"/>
+          <a:ext xmlns:a="http://schemas.openxmlformats.org/drawingml/2006/main" cx="10972800" cy="3622675"/>
         </p:xfrm>
         <a:graphic xmlns:a="http://schemas.openxmlformats.org/drawingml/2006/main">
           <a:graphicData uri="http://schemas.openxmlformats.org/drawingml/2006/table">
@@ -4998,14 +5000,14 @@
                 <a:gridCol w="3333750"/>
                 <a:gridCol w="3333750"/>
               </a:tblGrid>
-              <a:tr h="517525">
+              <a:tr h="443593">
                 <a:tc>
                   <a:txBody>
                     <a:bodyPr/>
                     <a:lstStyle/>
                     <a:p>
                       <a:r>
-                        <a:rPr sz="1800" b="1">
+                        <a:rPr sz="1725" b="1">
                           <a:solidFill>
                             <a:srgbClr val="FFFFFF"/>
                           </a:solidFill>
@@ -5053,7 +5055,7 @@
                     <a:lstStyle/>
                     <a:p>
                       <a:r>
-                        <a:rPr sz="1800" b="1">
+                        <a:rPr sz="1725" b="1">
                           <a:solidFill>
                             <a:srgbClr val="FFFFFF"/>
                           </a:solidFill>
@@ -5095,7 +5097,7 @@
                     <a:lstStyle/>
                     <a:p>
                       <a:r>
-                        <a:rPr sz="1800" b="1">
+                        <a:rPr sz="1725" b="1">
                           <a:solidFill>
                             <a:srgbClr val="FFFFFF"/>
                           </a:solidFill>
@@ -5132,14 +5134,14 @@
                   </a:tcPr>
                 </a:tc>
               </a:tr>
-              <a:tr h="517525">
+              <a:tr h="443593">
                 <a:tc>
                   <a:txBody>
                     <a:bodyPr/>
                     <a:lstStyle/>
                     <a:p>
                       <a:r>
-                        <a:rPr sz="1800" b="0">
+                        <a:rPr sz="1725" b="0">
                           <a:solidFill>
                             <a:srgbClr val="193E3A"/>
                           </a:solidFill>
@@ -5181,7 +5183,7 @@
                     <a:lstStyle/>
                     <a:p>
                       <a:r>
-                        <a:rPr sz="1800" b="0">
+                        <a:rPr sz="1725" b="0">
                           <a:solidFill>
                             <a:srgbClr val="193E3A"/>
                           </a:solidFill>
@@ -5217,7 +5219,7 @@
                     <a:lstStyle/>
                     <a:p>
                       <a:r>
-                        <a:rPr sz="1800" b="0">
+                        <a:rPr sz="1725" b="0">
                           <a:solidFill>
                             <a:srgbClr val="193E3A"/>
                           </a:solidFill>
@@ -5248,14 +5250,14 @@
                   </a:tcPr>
                 </a:tc>
               </a:tr>
-              <a:tr h="517525">
+              <a:tr h="443593">
                 <a:tc>
                   <a:txBody>
                     <a:bodyPr/>
                     <a:lstStyle/>
                     <a:p>
                       <a:r>
-                        <a:rPr sz="1800" b="0">
+                        <a:rPr sz="1725" b="0">
                           <a:solidFill>
                             <a:srgbClr val="193E3A"/>
                           </a:solidFill>
@@ -5297,7 +5299,7 @@
                     <a:lstStyle/>
                     <a:p>
                       <a:r>
-                        <a:rPr sz="1800" b="0">
+                        <a:rPr sz="1725" b="0">
                           <a:solidFill>
                             <a:srgbClr val="193E3A"/>
                           </a:solidFill>
@@ -5333,7 +5335,7 @@
                     <a:lstStyle/>
                     <a:p>
                       <a:r>
-                        <a:rPr sz="1800" b="0">
+                        <a:rPr sz="1725" b="0">
                           <a:solidFill>
                             <a:srgbClr val="193E3A"/>
                           </a:solidFill>
@@ -5364,14 +5366,14 @@
                   </a:tcPr>
                 </a:tc>
               </a:tr>
-              <a:tr h="517525">
+              <a:tr h="443593">
                 <a:tc>
                   <a:txBody>
                     <a:bodyPr/>
                     <a:lstStyle/>
                     <a:p>
                       <a:r>
-                        <a:rPr sz="1800" b="0">
+                        <a:rPr sz="1725" b="0">
                           <a:solidFill>
                             <a:srgbClr val="193E3A"/>
                           </a:solidFill>
@@ -5379,7 +5381,7 @@
                           <a:ea typeface="Arial"/>
                           <a:cs typeface="Arial"/>
                         </a:rPr>
-                        <a:t>Recall</a:t>
+                        <a:t>Recall / sensitivity</a:t>
                       </a:r>
                     </a:p>
                   </a:txBody>
@@ -5413,7 +5415,7 @@
                     <a:lstStyle/>
                     <a:p>
                       <a:r>
-                        <a:rPr sz="1800" b="0">
+                        <a:rPr sz="1725" b="0">
                           <a:solidFill>
                             <a:srgbClr val="193E3A"/>
                           </a:solidFill>
@@ -5449,7 +5451,7 @@
                     <a:lstStyle/>
                     <a:p>
                       <a:r>
-                        <a:rPr sz="1800" b="0">
+                        <a:rPr sz="1725" b="0">
                           <a:solidFill>
                             <a:srgbClr val="193E3A"/>
                           </a:solidFill>
@@ -5480,14 +5482,14 @@
                   </a:tcPr>
                 </a:tc>
               </a:tr>
-              <a:tr h="517525">
+              <a:tr h="443593">
                 <a:tc>
                   <a:txBody>
                     <a:bodyPr/>
                     <a:lstStyle/>
                     <a:p>
                       <a:r>
-                        <a:rPr sz="1800" b="0">
+                        <a:rPr sz="1725" b="0">
                           <a:solidFill>
                             <a:srgbClr val="193E3A"/>
                           </a:solidFill>
@@ -5529,7 +5531,7 @@
                     <a:lstStyle/>
                     <a:p>
                       <a:r>
-                        <a:rPr sz="1800" b="0">
+                        <a:rPr sz="1725" b="0">
                           <a:solidFill>
                             <a:srgbClr val="193E3A"/>
                           </a:solidFill>
@@ -5565,7 +5567,7 @@
                     <a:lstStyle/>
                     <a:p>
                       <a:r>
-                        <a:rPr sz="1800" b="0">
+                        <a:rPr sz="1725" b="0">
                           <a:solidFill>
                             <a:srgbClr val="193E3A"/>
                           </a:solidFill>
@@ -5573,7 +5575,7 @@
                           <a:ea typeface="Arial"/>
                           <a:cs typeface="Arial"/>
                         </a:rPr>
-                        <a:t>54,38%</a:t>
+                        <a:t>54,37%</a:t>
                       </a:r>
                     </a:p>
                   </a:txBody>
@@ -5596,14 +5598,130 @@
                   </a:tcPr>
                 </a:tc>
               </a:tr>
-              <a:tr h="517525">
+              <a:tr h="443593">
                 <a:tc>
                   <a:txBody>
                     <a:bodyPr/>
                     <a:lstStyle/>
                     <a:p>
                       <a:r>
-                        <a:rPr sz="1800" b="0">
+                        <a:rPr sz="1725" b="0">
+                          <a:solidFill>
+                            <a:srgbClr val="193E3A"/>
+                          </a:solidFill>
+                          <a:latin typeface="Arial"/>
+                          <a:ea typeface="Arial"/>
+                          <a:cs typeface="Arial"/>
+                        </a:rPr>
+                        <a:t>F1</a:t>
+                      </a:r>
+                    </a:p>
+                  </a:txBody>
+                  <a:tcPr marL="91440" marR="91440" marT="45720" marB="45720">
+                    <a:lnL w="9525">
+                      <a:solidFill>
+                        <a:srgbClr val="CBDDD6"/>
+                      </a:solidFill>
+                      <a:prstDash val="solid"/>
+                    </a:lnL>
+                    <a:lnR w="9525">
+                      <a:solidFill>
+                        <a:srgbClr val="CBDDD6"/>
+                      </a:solidFill>
+                      <a:prstDash val="solid"/>
+                    </a:lnR>
+                    <a:lnB w="9525">
+                      <a:solidFill>
+                        <a:srgbClr val="CBDDD6"/>
+                      </a:solidFill>
+                      <a:prstDash val="solid"/>
+                    </a:lnB>
+                    <a:solidFill>
+                      <a:srgbClr val="FFFFFF"/>
+                    </a:solidFill>
+                  </a:tcPr>
+                </a:tc>
+                <a:tc>
+                  <a:txBody>
+                    <a:bodyPr/>
+                    <a:lstStyle/>
+                    <a:p>
+                      <a:r>
+                        <a:rPr sz="1725" b="0">
+                          <a:solidFill>
+                            <a:srgbClr val="193E3A"/>
+                          </a:solidFill>
+                          <a:latin typeface="Arial"/>
+                          <a:ea typeface="Arial"/>
+                          <a:cs typeface="Arial"/>
+                        </a:rPr>
+                        <a:t>0,9174</a:t>
+                      </a:r>
+                    </a:p>
+                  </a:txBody>
+                  <a:tcPr marL="91440" marR="91440" marT="45720" marB="45720">
+                    <a:lnR w="9525">
+                      <a:solidFill>
+                        <a:srgbClr val="CBDDD6"/>
+                      </a:solidFill>
+                      <a:prstDash val="solid"/>
+                    </a:lnR>
+                    <a:lnB w="9525">
+                      <a:solidFill>
+                        <a:srgbClr val="CBDDD6"/>
+                      </a:solidFill>
+                      <a:prstDash val="solid"/>
+                    </a:lnB>
+                    <a:solidFill>
+                      <a:srgbClr val="FFFFFF"/>
+                    </a:solidFill>
+                  </a:tcPr>
+                </a:tc>
+                <a:tc>
+                  <a:txBody>
+                    <a:bodyPr/>
+                    <a:lstStyle/>
+                    <a:p>
+                      <a:r>
+                        <a:rPr sz="1725" b="0">
+                          <a:solidFill>
+                            <a:srgbClr val="193E3A"/>
+                          </a:solidFill>
+                          <a:latin typeface="Arial"/>
+                          <a:ea typeface="Arial"/>
+                          <a:cs typeface="Arial"/>
+                        </a:rPr>
+                        <a:t>0,3382</a:t>
+                      </a:r>
+                    </a:p>
+                  </a:txBody>
+                  <a:tcPr marL="91440" marR="91440" marT="45720" marB="45720">
+                    <a:lnR w="9525">
+                      <a:solidFill>
+                        <a:srgbClr val="CBDDD6"/>
+                      </a:solidFill>
+                      <a:prstDash val="solid"/>
+                    </a:lnR>
+                    <a:lnB w="9525">
+                      <a:solidFill>
+                        <a:srgbClr val="CBDDD6"/>
+                      </a:solidFill>
+                      <a:prstDash val="solid"/>
+                    </a:lnB>
+                    <a:solidFill>
+                      <a:srgbClr val="FFFFFF"/>
+                    </a:solidFill>
+                  </a:tcPr>
+                </a:tc>
+              </a:tr>
+              <a:tr h="443593">
+                <a:tc>
+                  <a:txBody>
+                    <a:bodyPr/>
+                    <a:lstStyle/>
+                    <a:p>
+                      <a:r>
+                        <a:rPr sz="1725" b="0">
                           <a:solidFill>
                             <a:srgbClr val="193E3A"/>
                           </a:solidFill>
@@ -5635,7 +5753,7 @@
                       <a:prstDash val="solid"/>
                     </a:lnB>
                     <a:solidFill>
-                      <a:srgbClr val="FFFFFF"/>
+                      <a:srgbClr val="E9F3EE"/>
                     </a:solidFill>
                   </a:tcPr>
                 </a:tc>
@@ -5645,7 +5763,7 @@
                     <a:lstStyle/>
                     <a:p>
                       <a:r>
-                        <a:rPr sz="1800" b="0">
+                        <a:rPr sz="1725" b="0">
                           <a:solidFill>
                             <a:srgbClr val="193E3A"/>
                           </a:solidFill>
@@ -5671,7 +5789,7 @@
                       <a:prstDash val="solid"/>
                     </a:lnB>
                     <a:solidFill>
-                      <a:srgbClr val="FFFFFF"/>
+                      <a:srgbClr val="E9F3EE"/>
                     </a:solidFill>
                   </a:tcPr>
                 </a:tc>
@@ -5681,7 +5799,7 @@
                     <a:lstStyle/>
                     <a:p>
                       <a:r>
-                        <a:rPr sz="1800" b="0">
+                        <a:rPr sz="1725" b="0">
                           <a:solidFill>
                             <a:srgbClr val="193E3A"/>
                           </a:solidFill>
@@ -5707,7 +5825,7 @@
                       <a:prstDash val="solid"/>
                     </a:lnB>
                     <a:solidFill>
-                      <a:srgbClr val="FFFFFF"/>
+                      <a:srgbClr val="E9F3EE"/>
                     </a:solidFill>
                   </a:tcPr>
                 </a:tc>
@@ -5761,6 +5879,7 @@
           </a:lstStyle>
           <a:p xmlns:a="http://schemas.openxmlformats.org/drawingml/2006/main">
             <a:pPr>
+              <a:buNone/>
               <a:defRPr sz="2325" b="1">
                 <a:solidFill>
                   <a:srgbClr val="087F77"/>
@@ -5829,6 +5948,7 @@
           </a:lstStyle>
           <a:p xmlns:a="http://schemas.openxmlformats.org/drawingml/2006/main">
             <a:pPr>
+              <a:buNone/>
               <a:defRPr sz="1875" b="0">
                 <a:solidFill>
                   <a:srgbClr val="617C77"/>
@@ -5897,6 +6017,7 @@
           </a:lstStyle>
           <a:p xmlns:a="http://schemas.openxmlformats.org/drawingml/2006/main">
             <a:pPr>
+              <a:buNone/>
               <a:defRPr sz="1575" b="0">
                 <a:solidFill>
                   <a:srgbClr val="617C77"/>
@@ -5994,6 +6115,7 @@
           </a:lstStyle>
           <a:p xmlns:a="http://schemas.openxmlformats.org/drawingml/2006/main">
             <a:pPr>
+              <a:buNone/>
               <a:defRPr sz="3225" b="1">
                 <a:solidFill>
                   <a:srgbClr val="FFFFFF"/>
@@ -6012,7 +6134,7 @@
                 <a:ea typeface="Arial"/>
                 <a:cs typeface="Arial"/>
               </a:rPr>
-              <a:t>Калибрлеу және OOD: іске қосу күйі</a:t>
+              <a:t>Калибрлеу және OOD іске қосылды</a:t>
             </a:r>
           </a:p>
         </p:txBody>
@@ -6062,6 +6184,7 @@
           </a:lstStyle>
           <a:p xmlns:a="http://schemas.openxmlformats.org/drawingml/2006/main">
             <a:pPr>
+              <a:buNone/>
               <a:defRPr sz="1275" b="0">
                 <a:solidFill>
                   <a:srgbClr val="B8E5D8"/>
@@ -6130,6 +6253,7 @@
           </a:lstStyle>
           <a:p xmlns:a="http://schemas.openxmlformats.org/drawingml/2006/main">
             <a:pPr>
+              <a:buNone/>
               <a:defRPr sz="3000" b="1">
                 <a:solidFill>
                   <a:srgbClr val="B8E5D8"/>
@@ -6198,6 +6322,7 @@
           </a:lstStyle>
           <a:p xmlns:a="http://schemas.openxmlformats.org/drawingml/2006/main">
             <a:pPr>
+              <a:buNone/>
               <a:defRPr sz="2325" b="1">
                 <a:solidFill>
                   <a:srgbClr val="B8E5D8"/>
@@ -6266,6 +6391,7 @@
           </a:lstStyle>
           <a:p xmlns:a="http://schemas.openxmlformats.org/drawingml/2006/main">
             <a:pPr>
+              <a:buNone/>
               <a:defRPr sz="2100" b="0">
                 <a:solidFill>
                   <a:srgbClr val="FFFFFF"/>
@@ -6289,6 +6415,7 @@
           </a:p>
           <a:p xmlns:a="http://schemas.openxmlformats.org/drawingml/2006/main">
             <a:pPr>
+              <a:buNone/>
               <a:defRPr sz="2100" b="0">
                 <a:solidFill>
                   <a:srgbClr val="FFFFFF"/>
@@ -6312,6 +6439,7 @@
           </a:p>
           <a:p xmlns:a="http://schemas.openxmlformats.org/drawingml/2006/main">
             <a:pPr>
+              <a:buNone/>
               <a:defRPr sz="2100" b="0">
                 <a:solidFill>
                   <a:srgbClr val="FFFFFF"/>
@@ -6380,6 +6508,7 @@
           </a:lstStyle>
           <a:p xmlns:a="http://schemas.openxmlformats.org/drawingml/2006/main">
             <a:pPr>
+              <a:buNone/>
               <a:defRPr sz="2325" b="1">
                 <a:solidFill>
                   <a:srgbClr val="B8E5D8"/>
@@ -6448,6 +6577,7 @@
           </a:lstStyle>
           <a:p xmlns:a="http://schemas.openxmlformats.org/drawingml/2006/main">
             <a:pPr>
+              <a:buNone/>
               <a:defRPr sz="2025" b="0">
                 <a:solidFill>
                   <a:srgbClr val="FFFFFF"/>
@@ -6466,11 +6596,12 @@
                 <a:ea typeface="Arial"/>
                 <a:cs typeface="Arial"/>
               </a:rPr>
-              <a:t>T = 1, калибрлеу қолданылмаған</a:t>
+              <a:t>T = 0,97996, шек 0,745</a:t>
             </a:r>
           </a:p>
           <a:p xmlns:a="http://schemas.openxmlformats.org/drawingml/2006/main">
             <a:pPr>
+              <a:buNone/>
               <a:defRPr sz="2025" b="0">
                 <a:solidFill>
                   <a:srgbClr val="FFFFFF"/>
@@ -6489,11 +6620,12 @@
                 <a:ea typeface="Arial"/>
                 <a:cs typeface="Arial"/>
               </a:rPr>
-              <a:t>OOD параметрлері есептелмеген</a:t>
+              <a:t>952 / 952 validation тексерілді</a:t>
             </a:r>
           </a:p>
           <a:p xmlns:a="http://schemas.openxmlformats.org/drawingml/2006/main">
             <a:pPr>
+              <a:buNone/>
               <a:defRPr sz="2025" b="0">
                 <a:solidFill>
                   <a:srgbClr val="FFFFFF"/>
@@ -6512,7 +6644,7 @@
                 <a:ea typeface="Arial"/>
                 <a:cs typeface="Arial"/>
               </a:rPr>
-              <a:t>312 / 952 файл, желі тайм-ауты</a:t>
+              <a:t>OOD шегі: 26,3409</a:t>
             </a:r>
           </a:p>
         </p:txBody>
@@ -6562,6 +6694,7 @@
           </a:lstStyle>
           <a:p xmlns:a="http://schemas.openxmlformats.org/drawingml/2006/main">
             <a:pPr>
+              <a:buNone/>
               <a:defRPr sz="2175" b="1">
                 <a:solidFill>
                   <a:srgbClr val="B8E5D8"/>
@@ -8336,7 +8469,7 @@
           <p:cNvPr id="3" name="">
             <a:extLst xmlns:a="http://schemas.openxmlformats.org/drawingml/2006/main">
               <a:ext uri="{FF2B5EF4-FFF2-40B4-BE49-F238E27FC236}">
-                <a16:creationId xmlns:a16="http://schemas.microsoft.com/office/drawing/2014/main" id="{3B1FB806-647D-4023-940D-730E961DACE8}"/>
+                <a16:creationId xmlns:a16="http://schemas.microsoft.com/office/drawing/2014/main" id="{DE1B3F6E-5B57-4F7A-9910-122E455ED9E1}"/>
               </a:ext>
             </a:extLst>
           </p:cNvPr>
@@ -8779,7 +8912,7 @@
                           <a:ea typeface="Arial"/>
                           <a:cs typeface="Arial"/>
                         </a:rPr>
-                        <a:t>0,485</a:t>
+                        <a:t>0,475</a:t>
                       </a:r>
                     </a:p>
                   </a:txBody>
@@ -8815,7 +8948,7 @@
                           <a:ea typeface="Arial"/>
                           <a:cs typeface="Arial"/>
                         </a:rPr>
-                        <a:t>0,740</a:t>
+                        <a:t>0,745</a:t>
                       </a:r>
                     </a:p>
                   </a:txBody>
@@ -9625,7 +9758,7 @@
                 <a:ea typeface="Arial"/>
                 <a:cs typeface="Arial"/>
               </a:rPr>
-              <a:t>z = ln 4,  p = 0,80 ≥ 0,740</a:t>
+              <a:t>p_raw = 0,80, p_cal ≈ 0,804 ≥ 0,745</a:t>
             </a:r>
           </a:p>
         </p:txBody>
@@ -9871,7 +10004,7 @@
           <p:cNvPr id="3" name="">
             <a:extLst xmlns:a="http://schemas.openxmlformats.org/drawingml/2006/main">
               <a:ext uri="{FF2B5EF4-FFF2-40B4-BE49-F238E27FC236}">
-                <a16:creationId xmlns:a16="http://schemas.microsoft.com/office/drawing/2014/main" id="{6A6913E0-5136-42A3-A058-9E8D700FEA57}"/>
+                <a16:creationId xmlns:a16="http://schemas.microsoft.com/office/drawing/2014/main" id="{76AC81A9-2618-4EE1-B190-E6C7A47CF7CF}"/>
               </a:ext>
             </a:extLst>
           </p:cNvPr>
@@ -9880,7 +10013,7 @@
         </p:nvGraphicFramePr>
         <p:xfrm>
           <a:off xmlns:a="http://schemas.openxmlformats.org/drawingml/2006/main" x="609600" y="1714500"/>
-          <a:ext xmlns:a="http://schemas.openxmlformats.org/drawingml/2006/main" cx="10972800" cy="3105150"/>
+          <a:ext xmlns:a="http://schemas.openxmlformats.org/drawingml/2006/main" cx="10972800" cy="3622675"/>
         </p:xfrm>
         <a:graphic xmlns:a="http://schemas.openxmlformats.org/drawingml/2006/main">
           <a:graphicData uri="http://schemas.openxmlformats.org/drawingml/2006/table">
@@ -9891,14 +10024,14 @@
                 <a:gridCol w="3333750"/>
                 <a:gridCol w="3333750"/>
               </a:tblGrid>
-              <a:tr h="517525">
+              <a:tr h="443593">
                 <a:tc>
                   <a:txBody>
                     <a:bodyPr/>
                     <a:lstStyle/>
                     <a:p>
                       <a:r>
-                        <a:rPr sz="1800" b="1">
+                        <a:rPr sz="1725" b="1">
                           <a:solidFill>
                             <a:srgbClr val="FFFFFF"/>
                           </a:solidFill>
@@ -9946,7 +10079,7 @@
                     <a:lstStyle/>
                     <a:p>
                       <a:r>
-                        <a:rPr sz="1800" b="1">
+                        <a:rPr sz="1725" b="1">
                           <a:solidFill>
                             <a:srgbClr val="FFFFFF"/>
                           </a:solidFill>
@@ -9988,7 +10121,7 @@
                     <a:lstStyle/>
                     <a:p>
                       <a:r>
-                        <a:rPr sz="1800" b="1">
+                        <a:rPr sz="1725" b="1">
                           <a:solidFill>
                             <a:srgbClr val="FFFFFF"/>
                           </a:solidFill>
@@ -10025,14 +10158,14 @@
                   </a:tcPr>
                 </a:tc>
               </a:tr>
-              <a:tr h="517525">
+              <a:tr h="443593">
                 <a:tc>
                   <a:txBody>
                     <a:bodyPr/>
                     <a:lstStyle/>
                     <a:p>
                       <a:r>
-                        <a:rPr sz="1800" b="0">
+                        <a:rPr sz="1725" b="0">
                           <a:solidFill>
                             <a:srgbClr val="193E3A"/>
                           </a:solidFill>
@@ -10074,7 +10207,7 @@
                     <a:lstStyle/>
                     <a:p>
                       <a:r>
-                        <a:rPr sz="1800" b="0">
+                        <a:rPr sz="1725" b="0">
                           <a:solidFill>
                             <a:srgbClr val="193E3A"/>
                           </a:solidFill>
@@ -10082,7 +10215,7 @@
                           <a:ea typeface="Arial"/>
                           <a:cs typeface="Arial"/>
                         </a:rPr>
-                        <a:t>71,68%</a:t>
+                        <a:t>71,52%</a:t>
                       </a:r>
                     </a:p>
                   </a:txBody>
@@ -10110,7 +10243,7 @@
                     <a:lstStyle/>
                     <a:p>
                       <a:r>
-                        <a:rPr sz="1800" b="0">
+                        <a:rPr sz="1725" b="0">
                           <a:solidFill>
                             <a:srgbClr val="193E3A"/>
                           </a:solidFill>
@@ -10141,14 +10274,130 @@
                   </a:tcPr>
                 </a:tc>
               </a:tr>
-              <a:tr h="517525">
+              <a:tr h="443593">
                 <a:tc>
                   <a:txBody>
                     <a:bodyPr/>
                     <a:lstStyle/>
                     <a:p>
                       <a:r>
-                        <a:rPr sz="1800" b="0">
+                        <a:rPr sz="1725" b="0">
+                          <a:solidFill>
+                            <a:srgbClr val="193E3A"/>
+                          </a:solidFill>
+                          <a:latin typeface="Arial"/>
+                          <a:ea typeface="Arial"/>
+                          <a:cs typeface="Arial"/>
+                        </a:rPr>
+                        <a:t>Precision</a:t>
+                      </a:r>
+                    </a:p>
+                  </a:txBody>
+                  <a:tcPr marL="91440" marR="91440" marT="45720" marB="45720">
+                    <a:lnL w="9525">
+                      <a:solidFill>
+                        <a:srgbClr val="CBDDD6"/>
+                      </a:solidFill>
+                      <a:prstDash val="solid"/>
+                    </a:lnL>
+                    <a:lnR w="9525">
+                      <a:solidFill>
+                        <a:srgbClr val="CBDDD6"/>
+                      </a:solidFill>
+                      <a:prstDash val="solid"/>
+                    </a:lnR>
+                    <a:lnB w="9525">
+                      <a:solidFill>
+                        <a:srgbClr val="CBDDD6"/>
+                      </a:solidFill>
+                      <a:prstDash val="solid"/>
+                    </a:lnB>
+                    <a:solidFill>
+                      <a:srgbClr val="E9F3EE"/>
+                    </a:solidFill>
+                  </a:tcPr>
+                </a:tc>
+                <a:tc>
+                  <a:txBody>
+                    <a:bodyPr/>
+                    <a:lstStyle/>
+                    <a:p>
+                      <a:r>
+                        <a:rPr sz="1725" b="0">
+                          <a:solidFill>
+                            <a:srgbClr val="193E3A"/>
+                          </a:solidFill>
+                          <a:latin typeface="Arial"/>
+                          <a:ea typeface="Arial"/>
+                          <a:cs typeface="Arial"/>
+                        </a:rPr>
+                        <a:t>70,81%</a:t>
+                      </a:r>
+                    </a:p>
+                  </a:txBody>
+                  <a:tcPr marL="91440" marR="91440" marT="45720" marB="45720">
+                    <a:lnR w="9525">
+                      <a:solidFill>
+                        <a:srgbClr val="CBDDD6"/>
+                      </a:solidFill>
+                      <a:prstDash val="solid"/>
+                    </a:lnR>
+                    <a:lnB w="9525">
+                      <a:solidFill>
+                        <a:srgbClr val="CBDDD6"/>
+                      </a:solidFill>
+                      <a:prstDash val="solid"/>
+                    </a:lnB>
+                    <a:solidFill>
+                      <a:srgbClr val="E9F3EE"/>
+                    </a:solidFill>
+                  </a:tcPr>
+                </a:tc>
+                <a:tc>
+                  <a:txBody>
+                    <a:bodyPr/>
+                    <a:lstStyle/>
+                    <a:p>
+                      <a:r>
+                        <a:rPr sz="1725" b="0">
+                          <a:solidFill>
+                            <a:srgbClr val="193E3A"/>
+                          </a:solidFill>
+                          <a:latin typeface="Arial"/>
+                          <a:ea typeface="Arial"/>
+                          <a:cs typeface="Arial"/>
+                        </a:rPr>
+                        <a:t>87,74%</a:t>
+                      </a:r>
+                    </a:p>
+                  </a:txBody>
+                  <a:tcPr marL="91440" marR="91440" marT="45720" marB="45720">
+                    <a:lnR w="9525">
+                      <a:solidFill>
+                        <a:srgbClr val="CBDDD6"/>
+                      </a:solidFill>
+                      <a:prstDash val="solid"/>
+                    </a:lnR>
+                    <a:lnB w="9525">
+                      <a:solidFill>
+                        <a:srgbClr val="CBDDD6"/>
+                      </a:solidFill>
+                      <a:prstDash val="solid"/>
+                    </a:lnB>
+                    <a:solidFill>
+                      <a:srgbClr val="E9F3EE"/>
+                    </a:solidFill>
+                  </a:tcPr>
+                </a:tc>
+              </a:tr>
+              <a:tr h="443593">
+                <a:tc>
+                  <a:txBody>
+                    <a:bodyPr/>
+                    <a:lstStyle/>
+                    <a:p>
+                      <a:r>
+                        <a:rPr sz="1725" b="0">
                           <a:solidFill>
                             <a:srgbClr val="193E3A"/>
                           </a:solidFill>
@@ -10180,7 +10429,7 @@
                       <a:prstDash val="solid"/>
                     </a:lnB>
                     <a:solidFill>
-                      <a:srgbClr val="E9F3EE"/>
+                      <a:srgbClr val="FFFFFF"/>
                     </a:solidFill>
                   </a:tcPr>
                 </a:tc>
@@ -10190,7 +10439,7 @@
                     <a:lstStyle/>
                     <a:p>
                       <a:r>
-                        <a:rPr sz="1800" b="0">
+                        <a:rPr sz="1725" b="0">
                           <a:solidFill>
                             <a:srgbClr val="193E3A"/>
                           </a:solidFill>
@@ -10216,7 +10465,7 @@
                       <a:prstDash val="solid"/>
                     </a:lnB>
                     <a:solidFill>
-                      <a:srgbClr val="E9F3EE"/>
+                      <a:srgbClr val="FFFFFF"/>
                     </a:solidFill>
                   </a:tcPr>
                 </a:tc>
@@ -10226,7 +10475,7 @@
                     <a:lstStyle/>
                     <a:p>
                       <a:r>
-                        <a:rPr sz="1800" b="0">
+                        <a:rPr sz="1725" b="0">
                           <a:solidFill>
                             <a:srgbClr val="193E3A"/>
                           </a:solidFill>
@@ -10252,19 +10501,19 @@
                       <a:prstDash val="solid"/>
                     </a:lnB>
                     <a:solidFill>
-                      <a:srgbClr val="E9F3EE"/>
+                      <a:srgbClr val="FFFFFF"/>
                     </a:solidFill>
                   </a:tcPr>
                 </a:tc>
               </a:tr>
-              <a:tr h="517525">
+              <a:tr h="443593">
                 <a:tc>
                   <a:txBody>
                     <a:bodyPr/>
                     <a:lstStyle/>
                     <a:p>
                       <a:r>
-                        <a:rPr sz="1800" b="0">
+                        <a:rPr sz="1725" b="0">
                           <a:solidFill>
                             <a:srgbClr val="193E3A"/>
                           </a:solidFill>
@@ -10296,7 +10545,7 @@
                       <a:prstDash val="solid"/>
                     </a:lnB>
                     <a:solidFill>
-                      <a:srgbClr val="FFFFFF"/>
+                      <a:srgbClr val="E9F3EE"/>
                     </a:solidFill>
                   </a:tcPr>
                 </a:tc>
@@ -10306,7 +10555,7 @@
                     <a:lstStyle/>
                     <a:p>
                       <a:r>
-                        <a:rPr sz="1800" b="0">
+                        <a:rPr sz="1725" b="0">
                           <a:solidFill>
                             <a:srgbClr val="193E3A"/>
                           </a:solidFill>
@@ -10314,7 +10563,7 @@
                           <a:ea typeface="Arial"/>
                           <a:cs typeface="Arial"/>
                         </a:rPr>
-                        <a:t>36,36%</a:t>
+                        <a:t>35,93%</a:t>
                       </a:r>
                     </a:p>
                   </a:txBody>
@@ -10332,7 +10581,7 @@
                       <a:prstDash val="solid"/>
                     </a:lnB>
                     <a:solidFill>
-                      <a:srgbClr val="FFFFFF"/>
+                      <a:srgbClr val="E9F3EE"/>
                     </a:solidFill>
                   </a:tcPr>
                 </a:tc>
@@ -10342,7 +10591,7 @@
                     <a:lstStyle/>
                     <a:p>
                       <a:r>
-                        <a:rPr sz="1800" b="0">
+                        <a:rPr sz="1725" b="0">
                           <a:solidFill>
                             <a:srgbClr val="193E3A"/>
                           </a:solidFill>
@@ -10368,19 +10617,19 @@
                       <a:prstDash val="solid"/>
                     </a:lnB>
                     <a:solidFill>
-                      <a:srgbClr val="FFFFFF"/>
+                      <a:srgbClr val="E9F3EE"/>
                     </a:solidFill>
                   </a:tcPr>
                 </a:tc>
               </a:tr>
-              <a:tr h="517525">
+              <a:tr h="443593">
                 <a:tc>
                   <a:txBody>
                     <a:bodyPr/>
                     <a:lstStyle/>
                     <a:p>
                       <a:r>
-                        <a:rPr sz="1800" b="0">
+                        <a:rPr sz="1725" b="0">
                           <a:solidFill>
                             <a:srgbClr val="193E3A"/>
                           </a:solidFill>
@@ -10412,7 +10661,7 @@
                       <a:prstDash val="solid"/>
                     </a:lnB>
                     <a:solidFill>
-                      <a:srgbClr val="E9F3EE"/>
+                      <a:srgbClr val="FFFFFF"/>
                     </a:solidFill>
                   </a:tcPr>
                 </a:tc>
@@ -10422,7 +10671,7 @@
                     <a:lstStyle/>
                     <a:p>
                       <a:r>
-                        <a:rPr sz="1800" b="0">
+                        <a:rPr sz="1725" b="0">
                           <a:solidFill>
                             <a:srgbClr val="193E3A"/>
                           </a:solidFill>
@@ -10430,7 +10679,7 @@
                           <a:ea typeface="Arial"/>
                           <a:cs typeface="Arial"/>
                         </a:rPr>
-                        <a:t>0,8040</a:t>
+                        <a:t>0,8031</a:t>
                       </a:r>
                     </a:p>
                   </a:txBody>
@@ -10448,7 +10697,7 @@
                       <a:prstDash val="solid"/>
                     </a:lnB>
                     <a:solidFill>
-                      <a:srgbClr val="E9F3EE"/>
+                      <a:srgbClr val="FFFFFF"/>
                     </a:solidFill>
                   </a:tcPr>
                 </a:tc>
@@ -10458,7 +10707,7 @@
                     <a:lstStyle/>
                     <a:p>
                       <a:r>
-                        <a:rPr sz="1800" b="0">
+                        <a:rPr sz="1725" b="0">
                           <a:solidFill>
                             <a:srgbClr val="193E3A"/>
                           </a:solidFill>
@@ -10484,19 +10733,19 @@
                       <a:prstDash val="solid"/>
                     </a:lnB>
                     <a:solidFill>
-                      <a:srgbClr val="E9F3EE"/>
+                      <a:srgbClr val="FFFFFF"/>
                     </a:solidFill>
                   </a:tcPr>
                 </a:tc>
               </a:tr>
-              <a:tr h="517525">
+              <a:tr h="443593">
                 <a:tc>
                   <a:txBody>
                     <a:bodyPr/>
                     <a:lstStyle/>
                     <a:p>
                       <a:r>
-                        <a:rPr sz="1800" b="0">
+                        <a:rPr sz="1725" b="0">
                           <a:solidFill>
                             <a:srgbClr val="193E3A"/>
                           </a:solidFill>
@@ -10528,7 +10777,7 @@
                       <a:prstDash val="solid"/>
                     </a:lnB>
                     <a:solidFill>
-                      <a:srgbClr val="FFFFFF"/>
+                      <a:srgbClr val="E9F3EE"/>
                     </a:solidFill>
                   </a:tcPr>
                 </a:tc>
@@ -10538,7 +10787,7 @@
                     <a:lstStyle/>
                     <a:p>
                       <a:r>
-                        <a:rPr sz="1800" b="0">
+                        <a:rPr sz="1725" b="0">
                           <a:solidFill>
                             <a:srgbClr val="193E3A"/>
                           </a:solidFill>
@@ -10564,7 +10813,7 @@
                       <a:prstDash val="solid"/>
                     </a:lnB>
                     <a:solidFill>
-                      <a:srgbClr val="FFFFFF"/>
+                      <a:srgbClr val="E9F3EE"/>
                     </a:solidFill>
                   </a:tcPr>
                 </a:tc>
@@ -10574,7 +10823,7 @@
                     <a:lstStyle/>
                     <a:p>
                       <a:r>
-                        <a:rPr sz="1800" b="0">
+                        <a:rPr sz="1725" b="0">
                           <a:solidFill>
                             <a:srgbClr val="193E3A"/>
                           </a:solidFill>
@@ -10600,7 +10849,7 @@
                       <a:prstDash val="solid"/>
                     </a:lnB>
                     <a:solidFill>
-                      <a:srgbClr val="FFFFFF"/>
+                      <a:srgbClr val="E9F3EE"/>
                     </a:solidFill>
                   </a:tcPr>
                 </a:tc>
@@ -10673,7 +10922,7 @@
                 <a:ea typeface="Arial"/>
                 <a:cs typeface="Arial"/>
               </a:rPr>
-              <a:t>p = 1,80 × 10⁻²⁰</a:t>
+              <a:t>p = 4,83 × 10⁻²¹</a:t>
             </a:r>
           </a:p>
         </p:txBody>
@@ -11057,7 +11306,7 @@
           <p:cNvPr id="3" name="">
             <a:extLst xmlns:a="http://schemas.openxmlformats.org/drawingml/2006/main">
               <a:ext uri="{FF2B5EF4-FFF2-40B4-BE49-F238E27FC236}">
-                <a16:creationId xmlns:a16="http://schemas.microsoft.com/office/drawing/2014/main" id="{29F1E25B-09B6-454A-BDC0-2512307E5DC7}"/>
+                <a16:creationId xmlns:a16="http://schemas.microsoft.com/office/drawing/2014/main" id="{889621C8-30E2-4672-9413-2F2A6A04C086}"/>
               </a:ext>
             </a:extLst>
           </p:cNvPr>
@@ -11067,7 +11316,7 @@
           <p:nvPr/>
         </p:nvPicPr>
         <p:blipFill>
-          <a:blip xmlns:r="http://schemas.openxmlformats.org/officeDocument/2006/relationships" xmlns:a="http://schemas.openxmlformats.org/drawingml/2006/main" r:embed="R6dc5a5ca6bb14bf2"/>
+          <a:blip xmlns:r="http://schemas.openxmlformats.org/officeDocument/2006/relationships" xmlns:a="http://schemas.openxmlformats.org/drawingml/2006/main" r:embed="Ra4f547400dda46cc"/>
           <a:stretch xmlns:a="http://schemas.openxmlformats.org/drawingml/2006/main"/>
         </p:blipFill>
         <p:spPr>
@@ -11600,7 +11849,7 @@
           <p:cNvPr id="3" name="">
             <a:extLst xmlns:a="http://schemas.openxmlformats.org/drawingml/2006/main">
               <a:ext uri="{FF2B5EF4-FFF2-40B4-BE49-F238E27FC236}">
-                <a16:creationId xmlns:a16="http://schemas.microsoft.com/office/drawing/2014/main" id="{B3E27F6E-8FFC-49BD-ABF6-8B0D58FC7460}"/>
+                <a16:creationId xmlns:a16="http://schemas.microsoft.com/office/drawing/2014/main" id="{97B6F7E9-331C-44CA-AEAE-E127888CA0AA}"/>
               </a:ext>
             </a:extLst>
           </p:cNvPr>
@@ -11610,7 +11859,7 @@
           <p:nvPr/>
         </p:nvPicPr>
         <p:blipFill>
-          <a:blip xmlns:r="http://schemas.openxmlformats.org/officeDocument/2006/relationships" xmlns:a="http://schemas.openxmlformats.org/drawingml/2006/main" r:embed="R2099249900e144f8"/>
+          <a:blip xmlns:r="http://schemas.openxmlformats.org/officeDocument/2006/relationships" xmlns:a="http://schemas.openxmlformats.org/drawingml/2006/main" r:embed="Re8c1dcefbfc349cc"/>
           <a:stretch xmlns:a="http://schemas.openxmlformats.org/drawingml/2006/main"/>
         </p:blipFill>
         <p:spPr>
@@ -12074,7 +12323,7 @@
           <p:cNvPr id="3" name="">
             <a:extLst xmlns:a="http://schemas.openxmlformats.org/drawingml/2006/main">
               <a:ext uri="{FF2B5EF4-FFF2-40B4-BE49-F238E27FC236}">
-                <a16:creationId xmlns:a16="http://schemas.microsoft.com/office/drawing/2014/main" id="{EEA4B106-44F7-417F-86C2-2DB6928EBA35}"/>
+                <a16:creationId xmlns:a16="http://schemas.microsoft.com/office/drawing/2014/main" id="{CE93AABE-DCB3-45F9-B88F-812A13E2A2C7}"/>
               </a:ext>
             </a:extLst>
           </p:cNvPr>
@@ -12084,7 +12333,7 @@
           <p:nvPr/>
         </p:nvPicPr>
         <p:blipFill>
-          <a:blip xmlns:r="http://schemas.openxmlformats.org/officeDocument/2006/relationships" xmlns:a="http://schemas.openxmlformats.org/drawingml/2006/main" r:embed="R853c6958f4a944bc"/>
+          <a:blip xmlns:r="http://schemas.openxmlformats.org/officeDocument/2006/relationships" xmlns:a="http://schemas.openxmlformats.org/drawingml/2006/main" r:embed="R2887cf7f91c14c9e"/>
           <a:stretch xmlns:a="http://schemas.openxmlformats.org/drawingml/2006/main"/>
         </p:blipFill>
         <p:spPr>
@@ -12102,7 +12351,7 @@
           <p:cNvPr id="4" name="">
             <a:extLst xmlns:a="http://schemas.openxmlformats.org/drawingml/2006/main">
               <a:ext uri="{FF2B5EF4-FFF2-40B4-BE49-F238E27FC236}">
-                <a16:creationId xmlns:a16="http://schemas.microsoft.com/office/drawing/2014/main" id="{9D3C2524-B5B4-4B2A-AB7B-A3FF140D65E9}"/>
+                <a16:creationId xmlns:a16="http://schemas.microsoft.com/office/drawing/2014/main" id="{E201A30C-9F54-4E1C-9449-7697B8144189}"/>
               </a:ext>
             </a:extLst>
           </p:cNvPr>
@@ -12112,13 +12361,13 @@
           <p:nvPr/>
         </p:nvPicPr>
         <p:blipFill>
-          <a:blip xmlns:r="http://schemas.openxmlformats.org/officeDocument/2006/relationships" xmlns:a="http://schemas.openxmlformats.org/drawingml/2006/main" r:embed="R031d0597b5954e39"/>
+          <a:blip xmlns:r="http://schemas.openxmlformats.org/officeDocument/2006/relationships" xmlns:a="http://schemas.openxmlformats.org/drawingml/2006/main" r:embed="Rbfefb9a7013b46cb"/>
           <a:stretch xmlns:a="http://schemas.openxmlformats.org/drawingml/2006/main"/>
         </p:blipFill>
         <p:spPr>
           <a:xfrm xmlns:a="http://schemas.openxmlformats.org/drawingml/2006/main">
-            <a:off x="7419975" y="1677160"/>
-            <a:ext cx="2867025" cy="4056130"/>
+            <a:off x="7419975" y="1680490"/>
+            <a:ext cx="2867025" cy="4049470"/>
           </a:xfrm>
           <a:prstGeom xmlns:a="http://schemas.openxmlformats.org/drawingml/2006/main" prst="rect">
             <a:avLst/>

--- a/presentation/tynys_project_12slides_kz.pptx
+++ b/presentation/tynys_project_12slides_kz.pptx
@@ -2,24 +2,24 @@
 <file path=ppt/presentation.xml><?xml version="1.0" encoding="utf-8"?>
 <p:presentation xmlns:p="http://schemas.openxmlformats.org/presentationml/2006/main">
   <p:sldMasterIdLst>
-    <p:sldMasterId xmlns:r="http://schemas.openxmlformats.org/officeDocument/2006/relationships" id="2147483648" r:id="Rf6ca39ad066a4f2e"/>
+    <p:sldMasterId xmlns:r="http://schemas.openxmlformats.org/officeDocument/2006/relationships" id="2147483648" r:id="R9b898f1b7e544db7"/>
   </p:sldMasterIdLst>
   <p:notesMasterIdLst>
-    <p:notesMasterId xmlns:r="http://schemas.openxmlformats.org/officeDocument/2006/relationships" r:id="R7296dc908b164706"/>
+    <p:notesMasterId xmlns:r="http://schemas.openxmlformats.org/officeDocument/2006/relationships" r:id="Rd69a1c60fb7449dc"/>
   </p:notesMasterIdLst>
   <p:sldIdLst>
-    <p:sldId xmlns:r="http://schemas.openxmlformats.org/officeDocument/2006/relationships" id="256" r:id="R00e62bdc6d2d430e"/>
-    <p:sldId xmlns:r="http://schemas.openxmlformats.org/officeDocument/2006/relationships" id="257" r:id="R8fb2e52f4532441d"/>
-    <p:sldId xmlns:r="http://schemas.openxmlformats.org/officeDocument/2006/relationships" id="258" r:id="R07ada17e20604cff"/>
-    <p:sldId xmlns:r="http://schemas.openxmlformats.org/officeDocument/2006/relationships" id="259" r:id="Rb0145468882841eb"/>
-    <p:sldId xmlns:r="http://schemas.openxmlformats.org/officeDocument/2006/relationships" id="260" r:id="R7d3882c1225c4a84"/>
-    <p:sldId xmlns:r="http://schemas.openxmlformats.org/officeDocument/2006/relationships" id="261" r:id="R2ed3aaad64a849cf"/>
-    <p:sldId xmlns:r="http://schemas.openxmlformats.org/officeDocument/2006/relationships" id="262" r:id="R68d10881bedf408b"/>
-    <p:sldId xmlns:r="http://schemas.openxmlformats.org/officeDocument/2006/relationships" id="263" r:id="Rad21329a70424b60"/>
-    <p:sldId xmlns:r="http://schemas.openxmlformats.org/officeDocument/2006/relationships" id="264" r:id="Rcda2d06ea15f4c22"/>
-    <p:sldId xmlns:r="http://schemas.openxmlformats.org/officeDocument/2006/relationships" id="265" r:id="R7fbb8ef651184338"/>
-    <p:sldId xmlns:r="http://schemas.openxmlformats.org/officeDocument/2006/relationships" id="266" r:id="R46d79641aa1b4ead"/>
-    <p:sldId xmlns:r="http://schemas.openxmlformats.org/officeDocument/2006/relationships" id="267" r:id="Re278e2e6f8624623"/>
+    <p:sldId xmlns:r="http://schemas.openxmlformats.org/officeDocument/2006/relationships" id="256" r:id="R1b2e5fe732ac4778"/>
+    <p:sldId xmlns:r="http://schemas.openxmlformats.org/officeDocument/2006/relationships" id="257" r:id="R65e303c2197d4c51"/>
+    <p:sldId xmlns:r="http://schemas.openxmlformats.org/officeDocument/2006/relationships" id="258" r:id="Ra1b953a122bd4916"/>
+    <p:sldId xmlns:r="http://schemas.openxmlformats.org/officeDocument/2006/relationships" id="259" r:id="R0405ac2a13b243ba"/>
+    <p:sldId xmlns:r="http://schemas.openxmlformats.org/officeDocument/2006/relationships" id="260" r:id="R813e260fc2b94faf"/>
+    <p:sldId xmlns:r="http://schemas.openxmlformats.org/officeDocument/2006/relationships" id="261" r:id="R0612909b74c149db"/>
+    <p:sldId xmlns:r="http://schemas.openxmlformats.org/officeDocument/2006/relationships" id="262" r:id="R885820e2036849e3"/>
+    <p:sldId xmlns:r="http://schemas.openxmlformats.org/officeDocument/2006/relationships" id="263" r:id="Re28ee74237f547a3"/>
+    <p:sldId xmlns:r="http://schemas.openxmlformats.org/officeDocument/2006/relationships" id="264" r:id="R4c0763f9496b4369"/>
+    <p:sldId xmlns:r="http://schemas.openxmlformats.org/officeDocument/2006/relationships" id="265" r:id="Re0371f9110534038"/>
+    <p:sldId xmlns:r="http://schemas.openxmlformats.org/officeDocument/2006/relationships" id="266" r:id="R2ebe23c8396d4045"/>
+    <p:sldId xmlns:r="http://schemas.openxmlformats.org/officeDocument/2006/relationships" id="267" r:id="Rcbe88b6a2b374663"/>
   </p:sldIdLst>
   <p:sldSz cx="12192000" cy="6858000"/>
   <p:notesSz cx="6858000" cy="9144000"/>
@@ -533,7 +533,7 @@
           <a:lstStyle xmlns:a="http://schemas.openxmlformats.org/drawingml/2006/main"/>
           <a:p xmlns:a="http://schemas.openxmlformats.org/drawingml/2006/main">
             <a:r>
-              <a:t>Калибрлеу, OOD және DICOM жұмыс істейді, 40 тест өтті. Docker конфигурациясы бар, бірақ daemon өшірулі болғандықтан контейнер тексерілмеді. Келесі кезең — ensemble, кейін multi-label жеке эксперименті.</a:t>
+              <a:t>Ensemble қосылды, 49 тест өтті. Калибрлеу мен OOD жұмыс істейді. Docker daemon өшірулі, контейнер тексерілмеді. Келесі кезең — сайттан бөлек multi-label эксперименті.</a:t>
             </a:r>
           </a:p>
           <a:p xmlns:a="http://schemas.openxmlformats.org/drawingml/2006/main">
@@ -613,7 +613,7 @@
           <a:lstStyle xmlns:a="http://schemas.openxmlformats.org/drawingml/2006/main"/>
           <a:p xmlns:a="http://schemas.openxmlformats.org/drawingml/2006/main">
             <a:r>
-              <a:t>OpenI-дің сол 200 суретін жаңа калибрленген балл және 0,745 шегімен қайта бағаладым. Accuracy 55,00%, recall 57,50%, AUC 0,5442. Таңдау мен шекті сыртқы белгілерге қарап өзгерткен жоқпын. Report UID — surrogate топ, нақты пациент ID толық расталмаған.</a:t>
+              <a:t>OpenI-дің сол 200 суретін жаңа калибрленген балл және 0,745 шегімен қайта бағаладым. Accuracy 55,00%, recall 57,50%, AUC 0,5442. Таңдау мен шекті сыртқы белгілерге қарап өзгерткен жоқпын. Report UID — surrogate топ, нақты пациент ID толық расталмаған. Сыртқы CNN accuracy 21,50%, Ensemble 55,00%. Екі модельді біріктіру осы сыртқы жиындағы мәселені шешпеді.</a:t>
             </a:r>
           </a:p>
           <a:p xmlns:a="http://schemas.openxmlformats.org/drawingml/2006/main">
@@ -1093,7 +1093,7 @@
           <a:lstStyle xmlns:a="http://schemas.openxmlformats.org/drawingml/2006/main"/>
           <a:p xmlns:a="http://schemas.openxmlformats.org/drawingml/2006/main">
             <a:r>
-              <a:t>Қазіргі калибрленген test: CNN accuracy 71,52%, MobileNetV2 89,16%. MobileNetV2 recall 96,12%, FN 15, FP 52. 90% мақсатына жетпеді. McNemar: CNN-only 19, MobileNetV2-only 128, p=4,83×10⁻²¹.</a:t>
+              <a:t>Қазіргі калибрленген test: CNN accuracy 71,52%, MobileNetV2 89,16%. MobileNetV2 recall 96,12%, FN 15, FP 52. 90% мақсатына жетпеді. McNemar: CNN-only 19, MobileNetV2-only 128, p=4,83×10⁻²¹. Ensemble accuracy 89,16%, ROC-AUC 0,9583. Accuracy өскен жоқ.</a:t>
             </a:r>
           </a:p>
           <a:p xmlns:a="http://schemas.openxmlformats.org/drawingml/2006/main">
@@ -1173,7 +1173,7 @@
           <a:lstStyle xmlns:a="http://schemas.openxmlformats.org/drawingml/2006/main"/>
           <a:p xmlns:a="http://schemas.openxmlformats.org/drawingml/2006/main">
             <a:r>
-              <a:t>Сайт бір суретке екі модельдің калибрленген баллын, санатын және өз шегін көрсетеді. JPG, PNG, CR/DX DICOM қолданылады. Бір топта 10 файлға дейін, әрқайсысы 12 МБ-қа дейін. CT/MR қабылданбайды.</a:t>
+              <a:t>Бір суретке CNN, MobileNetV2 және Ensemble санаты, баллы және өз шешім шегі көрсетіледі. Ensemble коэффициенттері тек validation NLL бойынша таңдалған: CNN шамамен 0,10%, MobileNetV2 99,90%. Сайт пен PDF осы конфигурацияны қолданады.</a:t>
             </a:r>
           </a:p>
           <a:p xmlns:a="http://schemas.openxmlformats.org/drawingml/2006/main">
@@ -3156,12 +3156,12 @@
   </p:cSld>
   <p:clrMap bg1="lt1" tx1="dk1" bg2="lt2" tx2="dk2" accent1="accent1" accent2="accent2" accent3="accent3" accent4="accent4" accent5="accent5" accent6="accent6" hlink="hlink" folHlink="folHlink"/>
   <p:sldLayoutIdLst>
-    <p:sldLayoutId xmlns:r="http://schemas.openxmlformats.org/officeDocument/2006/relationships" id="2147483649" r:id="Rc85075be2c11472a"/>
-    <p:sldLayoutId xmlns:r="http://schemas.openxmlformats.org/officeDocument/2006/relationships" id="2147483650" r:id="R5587874fa2774627"/>
-    <p:sldLayoutId xmlns:r="http://schemas.openxmlformats.org/officeDocument/2006/relationships" id="2147483651" r:id="R09ca4ece41bd4c65"/>
-    <p:sldLayoutId xmlns:r="http://schemas.openxmlformats.org/officeDocument/2006/relationships" id="2147483652" r:id="R8575af8970684e9d"/>
-    <p:sldLayoutId xmlns:r="http://schemas.openxmlformats.org/officeDocument/2006/relationships" id="2147483653" r:id="Rbd6d5d0273f141ef"/>
-    <p:sldLayoutId xmlns:r="http://schemas.openxmlformats.org/officeDocument/2006/relationships" id="2147483654" r:id="R84beafb5e8774597"/>
+    <p:sldLayoutId xmlns:r="http://schemas.openxmlformats.org/officeDocument/2006/relationships" id="2147483649" r:id="R94689dfb6a854703"/>
+    <p:sldLayoutId xmlns:r="http://schemas.openxmlformats.org/officeDocument/2006/relationships" id="2147483650" r:id="Rbcafe72e3a4347ef"/>
+    <p:sldLayoutId xmlns:r="http://schemas.openxmlformats.org/officeDocument/2006/relationships" id="2147483651" r:id="R0b07750e32f04d09"/>
+    <p:sldLayoutId xmlns:r="http://schemas.openxmlformats.org/officeDocument/2006/relationships" id="2147483652" r:id="Re6fa33d4f5134e69"/>
+    <p:sldLayoutId xmlns:r="http://schemas.openxmlformats.org/officeDocument/2006/relationships" id="2147483653" r:id="R896af372174d4139"/>
+    <p:sldLayoutId xmlns:r="http://schemas.openxmlformats.org/officeDocument/2006/relationships" id="2147483654" r:id="R980dc8e64c2441db"/>
   </p:sldLayoutIdLst>
   <p:txStyles>
     <p:titleStyle>
@@ -3781,7 +3781,7 @@
           <p:cNvPr id="2" name="">
             <a:extLst xmlns:a="http://schemas.openxmlformats.org/drawingml/2006/main">
               <a:ext uri="{FF2B5EF4-FFF2-40B4-BE49-F238E27FC236}">
-                <a16:creationId xmlns:a16="http://schemas.microsoft.com/office/drawing/2014/main" id="{1AB3641E-C9A6-406B-9F15-6250F535801F}"/>
+                <a16:creationId xmlns:a16="http://schemas.microsoft.com/office/drawing/2014/main" id="{F335674D-31DC-4AEA-B2A4-58CE6C9B23A6}"/>
               </a:ext>
             </a:extLst>
           </p:cNvPr>
@@ -3791,7 +3791,7 @@
           <p:nvPr/>
         </p:nvPicPr>
         <p:blipFill>
-          <a:blip xmlns:r="http://schemas.openxmlformats.org/officeDocument/2006/relationships" xmlns:a="http://schemas.openxmlformats.org/drawingml/2006/main" r:embed="R7dce5e7ed50b4d6c"/>
+          <a:blip xmlns:r="http://schemas.openxmlformats.org/officeDocument/2006/relationships" xmlns:a="http://schemas.openxmlformats.org/drawingml/2006/main" r:embed="Raa6e9852ec824968"/>
           <a:stretch xmlns:a="http://schemas.openxmlformats.org/drawingml/2006/main"/>
         </p:blipFill>
         <p:spPr>
@@ -4383,7 +4383,7 @@
                 <a:ea typeface="Arial"/>
                 <a:cs typeface="Arial"/>
               </a:rPr>
-              <a:t>CR / DX DICOM қолдауы</a:t>
+              <a:t>DICOM, калибрлеу және OOD</a:t>
             </a:r>
           </a:p>
           <a:p xmlns:a="http://schemas.openxmlformats.org/drawingml/2006/main">
@@ -4407,7 +4407,7 @@
                 <a:ea typeface="Arial"/>
                 <a:cs typeface="Arial"/>
               </a:rPr>
-              <a:t>Калибрлеу және OOD</a:t>
+              <a:t>CNN + MobileNetV2 + Ensemble</a:t>
             </a:r>
           </a:p>
           <a:p xmlns:a="http://schemas.openxmlformats.org/drawingml/2006/main">
@@ -4431,7 +4431,7 @@
                 <a:ea typeface="Arial"/>
                 <a:cs typeface="Arial"/>
               </a:rPr>
-              <a:t>40 тест және CI</a:t>
+              <a:t>49 тест және CI</a:t>
             </a:r>
           </a:p>
           <a:p xmlns:a="http://schemas.openxmlformats.org/drawingml/2006/main">
@@ -4455,7 +4455,7 @@
                 <a:ea typeface="Arial"/>
                 <a:cs typeface="Arial"/>
               </a:rPr>
-              <a:t>Сыртқы бағалау</a:t>
+              <a:t>Ішкі және сыртқы бағалау</a:t>
             </a:r>
           </a:p>
         </p:txBody>
@@ -4593,7 +4593,7 @@
                 <a:ea typeface="Arial"/>
                 <a:cs typeface="Arial"/>
               </a:rPr>
-              <a:t>Ensemble дайындау</a:t>
+              <a:t>Multi-label жеке тәжірибесі</a:t>
             </a:r>
           </a:p>
           <a:p xmlns:a="http://schemas.openxmlformats.org/drawingml/2006/main">
@@ -4617,7 +4617,7 @@
                 <a:ea typeface="Arial"/>
                 <a:cs typeface="Arial"/>
               </a:rPr>
-              <a:t>Multi-label жеке тәжірибесі</a:t>
+              <a:t>Сыртқы деректе сапаны өсіру</a:t>
             </a:r>
           </a:p>
           <a:p xmlns:a="http://schemas.openxmlformats.org/drawingml/2006/main">
@@ -4980,7 +4980,7 @@
           <p:cNvPr id="3" name="">
             <a:extLst xmlns:a="http://schemas.openxmlformats.org/drawingml/2006/main">
               <a:ext uri="{FF2B5EF4-FFF2-40B4-BE49-F238E27FC236}">
-                <a16:creationId xmlns:a16="http://schemas.microsoft.com/office/drawing/2014/main" id="{BD0058B4-7E87-4BBD-9361-061C11EEF629}"/>
+                <a16:creationId xmlns:a16="http://schemas.microsoft.com/office/drawing/2014/main" id="{D00DE33D-D614-4669-910D-A142556D1B4B}"/>
               </a:ext>
             </a:extLst>
           </p:cNvPr>
@@ -4989,16 +4989,17 @@
         </p:nvGraphicFramePr>
         <p:xfrm>
           <a:off xmlns:a="http://schemas.openxmlformats.org/drawingml/2006/main" x="609600" y="1714500"/>
-          <a:ext xmlns:a="http://schemas.openxmlformats.org/drawingml/2006/main" cx="10972800" cy="3622675"/>
+          <a:ext xmlns:a="http://schemas.openxmlformats.org/drawingml/2006/main" cx="10972800" cy="3105150"/>
         </p:xfrm>
         <a:graphic xmlns:a="http://schemas.openxmlformats.org/drawingml/2006/main">
           <a:graphicData uri="http://schemas.openxmlformats.org/drawingml/2006/table">
             <a:tbl>
               <a:tblPr/>
               <a:tblGrid>
-                <a:gridCol w="4305300"/>
-                <a:gridCol w="3333750"/>
-                <a:gridCol w="3333750"/>
+                <a:gridCol w="3714750"/>
+                <a:gridCol w="2419350"/>
+                <a:gridCol w="2419350"/>
+                <a:gridCol w="2419350"/>
               </a:tblGrid>
               <a:tr h="443593">
                 <a:tc>
@@ -5007,7 +5008,7 @@
                     <a:lstStyle/>
                     <a:p>
                       <a:r>
-                        <a:rPr sz="1725" b="1">
+                        <a:rPr sz="1575" b="1">
                           <a:solidFill>
                             <a:srgbClr val="FFFFFF"/>
                           </a:solidFill>
@@ -5055,7 +5056,7 @@
                     <a:lstStyle/>
                     <a:p>
                       <a:r>
-                        <a:rPr sz="1725" b="1">
+                        <a:rPr sz="1575" b="1">
                           <a:solidFill>
                             <a:srgbClr val="FFFFFF"/>
                           </a:solidFill>
@@ -5063,7 +5064,7 @@
                           <a:ea typeface="Arial"/>
                           <a:cs typeface="Arial"/>
                         </a:rPr>
-                        <a:t>Ішкі test, 618</a:t>
+                        <a:t>CNN</a:t>
                       </a:r>
                     </a:p>
                   </a:txBody>
@@ -5097,7 +5098,7 @@
                     <a:lstStyle/>
                     <a:p>
                       <a:r>
-                        <a:rPr sz="1725" b="1">
+                        <a:rPr sz="1575" b="1">
                           <a:solidFill>
                             <a:srgbClr val="FFFFFF"/>
                           </a:solidFill>
@@ -5105,7 +5106,49 @@
                           <a:ea typeface="Arial"/>
                           <a:cs typeface="Arial"/>
                         </a:rPr>
-                        <a:t>OpenI, 200</a:t>
+                        <a:t>MobileNetV2</a:t>
+                      </a:r>
+                    </a:p>
+                  </a:txBody>
+                  <a:tcPr marL="91440" marR="91440" marT="45720" marB="45720">
+                    <a:lnR w="9525">
+                      <a:solidFill>
+                        <a:srgbClr val="CBDDD6"/>
+                      </a:solidFill>
+                      <a:prstDash val="solid"/>
+                    </a:lnR>
+                    <a:lnT w="9525">
+                      <a:solidFill>
+                        <a:srgbClr val="CBDDD6"/>
+                      </a:solidFill>
+                      <a:prstDash val="solid"/>
+                    </a:lnT>
+                    <a:lnB w="9525">
+                      <a:solidFill>
+                        <a:srgbClr val="CBDDD6"/>
+                      </a:solidFill>
+                      <a:prstDash val="solid"/>
+                    </a:lnB>
+                    <a:solidFill>
+                      <a:srgbClr val="193E3A"/>
+                    </a:solidFill>
+                  </a:tcPr>
+                </a:tc>
+                <a:tc>
+                  <a:txBody>
+                    <a:bodyPr/>
+                    <a:lstStyle/>
+                    <a:p>
+                      <a:r>
+                        <a:rPr sz="1575" b="1">
+                          <a:solidFill>
+                            <a:srgbClr val="FFFFFF"/>
+                          </a:solidFill>
+                          <a:latin typeface="Arial"/>
+                          <a:ea typeface="Arial"/>
+                          <a:cs typeface="Arial"/>
+                        </a:rPr>
+                        <a:t>Ensemble</a:t>
                       </a:r>
                     </a:p>
                   </a:txBody>
@@ -5141,7 +5184,7 @@
                     <a:lstStyle/>
                     <a:p>
                       <a:r>
-                        <a:rPr sz="1725" b="0">
+                        <a:rPr sz="1575" b="0">
                           <a:solidFill>
                             <a:srgbClr val="193E3A"/>
                           </a:solidFill>
@@ -5183,7 +5226,7 @@
                     <a:lstStyle/>
                     <a:p>
                       <a:r>
-                        <a:rPr sz="1725" b="0">
+                        <a:rPr sz="1575" b="0">
                           <a:solidFill>
                             <a:srgbClr val="193E3A"/>
                           </a:solidFill>
@@ -5191,7 +5234,7 @@
                           <a:ea typeface="Arial"/>
                           <a:cs typeface="Arial"/>
                         </a:rPr>
-                        <a:t>89,16%</a:t>
+                        <a:t>21,50%</a:t>
                       </a:r>
                     </a:p>
                   </a:txBody>
@@ -5219,7 +5262,43 @@
                     <a:lstStyle/>
                     <a:p>
                       <a:r>
-                        <a:rPr sz="1725" b="0">
+                        <a:rPr sz="1575" b="0">
+                          <a:solidFill>
+                            <a:srgbClr val="193E3A"/>
+                          </a:solidFill>
+                          <a:latin typeface="Arial"/>
+                          <a:ea typeface="Arial"/>
+                          <a:cs typeface="Arial"/>
+                        </a:rPr>
+                        <a:t>55,00%</a:t>
+                      </a:r>
+                    </a:p>
+                  </a:txBody>
+                  <a:tcPr marL="91440" marR="91440" marT="45720" marB="45720">
+                    <a:lnR w="9525">
+                      <a:solidFill>
+                        <a:srgbClr val="CBDDD6"/>
+                      </a:solidFill>
+                      <a:prstDash val="solid"/>
+                    </a:lnR>
+                    <a:lnB w="9525">
+                      <a:solidFill>
+                        <a:srgbClr val="CBDDD6"/>
+                      </a:solidFill>
+                      <a:prstDash val="solid"/>
+                    </a:lnB>
+                    <a:solidFill>
+                      <a:srgbClr val="FFFFFF"/>
+                    </a:solidFill>
+                  </a:tcPr>
+                </a:tc>
+                <a:tc>
+                  <a:txBody>
+                    <a:bodyPr/>
+                    <a:lstStyle/>
+                    <a:p>
+                      <a:r>
+                        <a:rPr sz="1575" b="0">
                           <a:solidFill>
                             <a:srgbClr val="193E3A"/>
                           </a:solidFill>
@@ -5257,7 +5336,7 @@
                     <a:lstStyle/>
                     <a:p>
                       <a:r>
-                        <a:rPr sz="1725" b="0">
+                        <a:rPr sz="1575" b="0">
                           <a:solidFill>
                             <a:srgbClr val="193E3A"/>
                           </a:solidFill>
@@ -5299,7 +5378,7 @@
                     <a:lstStyle/>
                     <a:p>
                       <a:r>
-                        <a:rPr sz="1725" b="0">
+                        <a:rPr sz="1575" b="0">
                           <a:solidFill>
                             <a:srgbClr val="193E3A"/>
                           </a:solidFill>
@@ -5307,7 +5386,7 @@
                           <a:ea typeface="Arial"/>
                           <a:cs typeface="Arial"/>
                         </a:rPr>
-                        <a:t>87,74%</a:t>
+                        <a:t>20,30%</a:t>
                       </a:r>
                     </a:p>
                   </a:txBody>
@@ -5335,7 +5414,43 @@
                     <a:lstStyle/>
                     <a:p>
                       <a:r>
-                        <a:rPr sz="1725" b="0">
+                        <a:rPr sz="1575" b="0">
+                          <a:solidFill>
+                            <a:srgbClr val="193E3A"/>
+                          </a:solidFill>
+                          <a:latin typeface="Arial"/>
+                          <a:ea typeface="Arial"/>
+                          <a:cs typeface="Arial"/>
+                        </a:rPr>
+                        <a:t>23,96%</a:t>
+                      </a:r>
+                    </a:p>
+                  </a:txBody>
+                  <a:tcPr marL="91440" marR="91440" marT="45720" marB="45720">
+                    <a:lnR w="9525">
+                      <a:solidFill>
+                        <a:srgbClr val="CBDDD6"/>
+                      </a:solidFill>
+                      <a:prstDash val="solid"/>
+                    </a:lnR>
+                    <a:lnB w="9525">
+                      <a:solidFill>
+                        <a:srgbClr val="CBDDD6"/>
+                      </a:solidFill>
+                      <a:prstDash val="solid"/>
+                    </a:lnB>
+                    <a:solidFill>
+                      <a:srgbClr val="E9F3EE"/>
+                    </a:solidFill>
+                  </a:tcPr>
+                </a:tc>
+                <a:tc>
+                  <a:txBody>
+                    <a:bodyPr/>
+                    <a:lstStyle/>
+                    <a:p>
+                      <a:r>
+                        <a:rPr sz="1575" b="0">
                           <a:solidFill>
                             <a:srgbClr val="193E3A"/>
                           </a:solidFill>
@@ -5373,7 +5488,7 @@
                     <a:lstStyle/>
                     <a:p>
                       <a:r>
-                        <a:rPr sz="1725" b="0">
+                        <a:rPr sz="1575" b="0">
                           <a:solidFill>
                             <a:srgbClr val="193E3A"/>
                           </a:solidFill>
@@ -5415,7 +5530,7 @@
                     <a:lstStyle/>
                     <a:p>
                       <a:r>
-                        <a:rPr sz="1725" b="0">
+                        <a:rPr sz="1575" b="0">
                           <a:solidFill>
                             <a:srgbClr val="193E3A"/>
                           </a:solidFill>
@@ -5423,7 +5538,7 @@
                           <a:ea typeface="Arial"/>
                           <a:cs typeface="Arial"/>
                         </a:rPr>
-                        <a:t>96,12%</a:t>
+                        <a:t>100,00%</a:t>
                       </a:r>
                     </a:p>
                   </a:txBody>
@@ -5451,7 +5566,43 @@
                     <a:lstStyle/>
                     <a:p>
                       <a:r>
-                        <a:rPr sz="1725" b="0">
+                        <a:rPr sz="1575" b="0">
+                          <a:solidFill>
+                            <a:srgbClr val="193E3A"/>
+                          </a:solidFill>
+                          <a:latin typeface="Arial"/>
+                          <a:ea typeface="Arial"/>
+                          <a:cs typeface="Arial"/>
+                        </a:rPr>
+                        <a:t>57,50%</a:t>
+                      </a:r>
+                    </a:p>
+                  </a:txBody>
+                  <a:tcPr marL="91440" marR="91440" marT="45720" marB="45720">
+                    <a:lnR w="9525">
+                      <a:solidFill>
+                        <a:srgbClr val="CBDDD6"/>
+                      </a:solidFill>
+                      <a:prstDash val="solid"/>
+                    </a:lnR>
+                    <a:lnB w="9525">
+                      <a:solidFill>
+                        <a:srgbClr val="CBDDD6"/>
+                      </a:solidFill>
+                      <a:prstDash val="solid"/>
+                    </a:lnB>
+                    <a:solidFill>
+                      <a:srgbClr val="FFFFFF"/>
+                    </a:solidFill>
+                  </a:tcPr>
+                </a:tc>
+                <a:tc>
+                  <a:txBody>
+                    <a:bodyPr/>
+                    <a:lstStyle/>
+                    <a:p>
+                      <a:r>
+                        <a:rPr sz="1575" b="0">
                           <a:solidFill>
                             <a:srgbClr val="193E3A"/>
                           </a:solidFill>
@@ -5489,7 +5640,7 @@
                     <a:lstStyle/>
                     <a:p>
                       <a:r>
-                        <a:rPr sz="1725" b="0">
+                        <a:rPr sz="1575" b="0">
                           <a:solidFill>
                             <a:srgbClr val="193E3A"/>
                           </a:solidFill>
@@ -5531,7 +5682,7 @@
                     <a:lstStyle/>
                     <a:p>
                       <a:r>
-                        <a:rPr sz="1725" b="0">
+                        <a:rPr sz="1575" b="0">
                           <a:solidFill>
                             <a:srgbClr val="193E3A"/>
                           </a:solidFill>
@@ -5539,7 +5690,7 @@
                           <a:ea typeface="Arial"/>
                           <a:cs typeface="Arial"/>
                         </a:rPr>
-                        <a:t>77,49%</a:t>
+                        <a:t>1,88%</a:t>
                       </a:r>
                     </a:p>
                   </a:txBody>
@@ -5567,7 +5718,43 @@
                     <a:lstStyle/>
                     <a:p>
                       <a:r>
-                        <a:rPr sz="1725" b="0">
+                        <a:rPr sz="1575" b="0">
+                          <a:solidFill>
+                            <a:srgbClr val="193E3A"/>
+                          </a:solidFill>
+                          <a:latin typeface="Arial"/>
+                          <a:ea typeface="Arial"/>
+                          <a:cs typeface="Arial"/>
+                        </a:rPr>
+                        <a:t>54,37%</a:t>
+                      </a:r>
+                    </a:p>
+                  </a:txBody>
+                  <a:tcPr marL="91440" marR="91440" marT="45720" marB="45720">
+                    <a:lnR w="9525">
+                      <a:solidFill>
+                        <a:srgbClr val="CBDDD6"/>
+                      </a:solidFill>
+                      <a:prstDash val="solid"/>
+                    </a:lnR>
+                    <a:lnB w="9525">
+                      <a:solidFill>
+                        <a:srgbClr val="CBDDD6"/>
+                      </a:solidFill>
+                      <a:prstDash val="solid"/>
+                    </a:lnB>
+                    <a:solidFill>
+                      <a:srgbClr val="E9F3EE"/>
+                    </a:solidFill>
+                  </a:tcPr>
+                </a:tc>
+                <a:tc>
+                  <a:txBody>
+                    <a:bodyPr/>
+                    <a:lstStyle/>
+                    <a:p>
+                      <a:r>
+                        <a:rPr sz="1575" b="0">
                           <a:solidFill>
                             <a:srgbClr val="193E3A"/>
                           </a:solidFill>
@@ -5605,7 +5792,7 @@
                     <a:lstStyle/>
                     <a:p>
                       <a:r>
-                        <a:rPr sz="1725" b="0">
+                        <a:rPr sz="1575" b="0">
                           <a:solidFill>
                             <a:srgbClr val="193E3A"/>
                           </a:solidFill>
@@ -5647,7 +5834,7 @@
                     <a:lstStyle/>
                     <a:p>
                       <a:r>
-                        <a:rPr sz="1725" b="0">
+                        <a:rPr sz="1575" b="0">
                           <a:solidFill>
                             <a:srgbClr val="193E3A"/>
                           </a:solidFill>
@@ -5655,7 +5842,7 @@
                           <a:ea typeface="Arial"/>
                           <a:cs typeface="Arial"/>
                         </a:rPr>
-                        <a:t>0,9174</a:t>
+                        <a:t>0,3376</a:t>
                       </a:r>
                     </a:p>
                   </a:txBody>
@@ -5683,7 +5870,43 @@
                     <a:lstStyle/>
                     <a:p>
                       <a:r>
-                        <a:rPr sz="1725" b="0">
+                        <a:rPr sz="1575" b="0">
+                          <a:solidFill>
+                            <a:srgbClr val="193E3A"/>
+                          </a:solidFill>
+                          <a:latin typeface="Arial"/>
+                          <a:ea typeface="Arial"/>
+                          <a:cs typeface="Arial"/>
+                        </a:rPr>
+                        <a:t>0,3382</a:t>
+                      </a:r>
+                    </a:p>
+                  </a:txBody>
+                  <a:tcPr marL="91440" marR="91440" marT="45720" marB="45720">
+                    <a:lnR w="9525">
+                      <a:solidFill>
+                        <a:srgbClr val="CBDDD6"/>
+                      </a:solidFill>
+                      <a:prstDash val="solid"/>
+                    </a:lnR>
+                    <a:lnB w="9525">
+                      <a:solidFill>
+                        <a:srgbClr val="CBDDD6"/>
+                      </a:solidFill>
+                      <a:prstDash val="solid"/>
+                    </a:lnB>
+                    <a:solidFill>
+                      <a:srgbClr val="FFFFFF"/>
+                    </a:solidFill>
+                  </a:tcPr>
+                </a:tc>
+                <a:tc>
+                  <a:txBody>
+                    <a:bodyPr/>
+                    <a:lstStyle/>
+                    <a:p>
+                      <a:r>
+                        <a:rPr sz="1575" b="0">
                           <a:solidFill>
                             <a:srgbClr val="193E3A"/>
                           </a:solidFill>
@@ -5721,7 +5944,7 @@
                     <a:lstStyle/>
                     <a:p>
                       <a:r>
-                        <a:rPr sz="1725" b="0">
+                        <a:rPr sz="1575" b="0">
                           <a:solidFill>
                             <a:srgbClr val="193E3A"/>
                           </a:solidFill>
@@ -5763,7 +5986,7 @@
                     <a:lstStyle/>
                     <a:p>
                       <a:r>
-                        <a:rPr sz="1725" b="0">
+                        <a:rPr sz="1575" b="0">
                           <a:solidFill>
                             <a:srgbClr val="193E3A"/>
                           </a:solidFill>
@@ -5771,7 +5994,7 @@
                           <a:ea typeface="Arial"/>
                           <a:cs typeface="Arial"/>
                         </a:rPr>
-                        <a:t>0,9581</a:t>
+                        <a:t>0,4706</a:t>
                       </a:r>
                     </a:p>
                   </a:txBody>
@@ -5799,7 +6022,7 @@
                     <a:lstStyle/>
                     <a:p>
                       <a:r>
-                        <a:rPr sz="1725" b="0">
+                        <a:rPr sz="1575" b="0">
                           <a:solidFill>
                             <a:srgbClr val="193E3A"/>
                           </a:solidFill>
@@ -5808,6 +6031,42 @@
                           <a:cs typeface="Arial"/>
                         </a:rPr>
                         <a:t>0,5442</a:t>
+                      </a:r>
+                    </a:p>
+                  </a:txBody>
+                  <a:tcPr marL="91440" marR="91440" marT="45720" marB="45720">
+                    <a:lnR w="9525">
+                      <a:solidFill>
+                        <a:srgbClr val="CBDDD6"/>
+                      </a:solidFill>
+                      <a:prstDash val="solid"/>
+                    </a:lnR>
+                    <a:lnB w="9525">
+                      <a:solidFill>
+                        <a:srgbClr val="CBDDD6"/>
+                      </a:solidFill>
+                      <a:prstDash val="solid"/>
+                    </a:lnB>
+                    <a:solidFill>
+                      <a:srgbClr val="E9F3EE"/>
+                    </a:solidFill>
+                  </a:tcPr>
+                </a:tc>
+                <a:tc>
+                  <a:txBody>
+                    <a:bodyPr/>
+                    <a:lstStyle/>
+                    <a:p>
+                      <a:r>
+                        <a:rPr sz="1575" b="0">
+                          <a:solidFill>
+                            <a:srgbClr val="193E3A"/>
+                          </a:solidFill>
+                          <a:latin typeface="Arial"/>
+                          <a:ea typeface="Arial"/>
+                          <a:cs typeface="Arial"/>
+                        </a:rPr>
+                        <a:t>0,5441</a:t>
                       </a:r>
                     </a:p>
                   </a:txBody>
@@ -6713,7 +6972,7 @@
                 <a:ea typeface="Arial"/>
                 <a:cs typeface="Arial"/>
               </a:rPr>
-              <a:t>Оқу прототипі. Клиникалық қолдануға бөлек тексеру қажет.</a:t>
+              <a:t>Ensemble: CNN 0,10% + MobileNetV2 99,90%</a:t>
             </a:r>
           </a:p>
         </p:txBody>
@@ -8469,7 +8728,7 @@
           <p:cNvPr id="3" name="">
             <a:extLst xmlns:a="http://schemas.openxmlformats.org/drawingml/2006/main">
               <a:ext uri="{FF2B5EF4-FFF2-40B4-BE49-F238E27FC236}">
-                <a16:creationId xmlns:a16="http://schemas.microsoft.com/office/drawing/2014/main" id="{DE1B3F6E-5B57-4F7A-9910-122E455ED9E1}"/>
+                <a16:creationId xmlns:a16="http://schemas.microsoft.com/office/drawing/2014/main" id="{97CE959E-5972-4F08-97B7-AA35FED2B336}"/>
               </a:ext>
             </a:extLst>
           </p:cNvPr>
@@ -10004,7 +10263,7 @@
           <p:cNvPr id="3" name="">
             <a:extLst xmlns:a="http://schemas.openxmlformats.org/drawingml/2006/main">
               <a:ext uri="{FF2B5EF4-FFF2-40B4-BE49-F238E27FC236}">
-                <a16:creationId xmlns:a16="http://schemas.microsoft.com/office/drawing/2014/main" id="{76AC81A9-2618-4EE1-B190-E6C7A47CF7CF}"/>
+                <a16:creationId xmlns:a16="http://schemas.microsoft.com/office/drawing/2014/main" id="{43BCF6B9-B082-4D99-B3F2-A8E255513F0C}"/>
               </a:ext>
             </a:extLst>
           </p:cNvPr>
@@ -10013,16 +10272,17 @@
         </p:nvGraphicFramePr>
         <p:xfrm>
           <a:off xmlns:a="http://schemas.openxmlformats.org/drawingml/2006/main" x="609600" y="1714500"/>
-          <a:ext xmlns:a="http://schemas.openxmlformats.org/drawingml/2006/main" cx="10972800" cy="3622675"/>
+          <a:ext xmlns:a="http://schemas.openxmlformats.org/drawingml/2006/main" cx="10972800" cy="3105150"/>
         </p:xfrm>
         <a:graphic xmlns:a="http://schemas.openxmlformats.org/drawingml/2006/main">
           <a:graphicData uri="http://schemas.openxmlformats.org/drawingml/2006/table">
             <a:tbl>
               <a:tblPr/>
               <a:tblGrid>
-                <a:gridCol w="4305300"/>
-                <a:gridCol w="3333750"/>
-                <a:gridCol w="3333750"/>
+                <a:gridCol w="3714750"/>
+                <a:gridCol w="2419350"/>
+                <a:gridCol w="2419350"/>
+                <a:gridCol w="2419350"/>
               </a:tblGrid>
               <a:tr h="443593">
                 <a:tc>
@@ -10031,7 +10291,7 @@
                     <a:lstStyle/>
                     <a:p>
                       <a:r>
-                        <a:rPr sz="1725" b="1">
+                        <a:rPr sz="1575" b="1">
                           <a:solidFill>
                             <a:srgbClr val="FFFFFF"/>
                           </a:solidFill>
@@ -10079,7 +10339,7 @@
                     <a:lstStyle/>
                     <a:p>
                       <a:r>
-                        <a:rPr sz="1725" b="1">
+                        <a:rPr sz="1575" b="1">
                           <a:solidFill>
                             <a:srgbClr val="FFFFFF"/>
                           </a:solidFill>
@@ -10121,7 +10381,7 @@
                     <a:lstStyle/>
                     <a:p>
                       <a:r>
-                        <a:rPr sz="1725" b="1">
+                        <a:rPr sz="1575" b="1">
                           <a:solidFill>
                             <a:srgbClr val="FFFFFF"/>
                           </a:solidFill>
@@ -10130,6 +10390,48 @@
                           <a:cs typeface="Arial"/>
                         </a:rPr>
                         <a:t>MobileNetV2</a:t>
+                      </a:r>
+                    </a:p>
+                  </a:txBody>
+                  <a:tcPr marL="91440" marR="91440" marT="45720" marB="45720">
+                    <a:lnR w="9525">
+                      <a:solidFill>
+                        <a:srgbClr val="CBDDD6"/>
+                      </a:solidFill>
+                      <a:prstDash val="solid"/>
+                    </a:lnR>
+                    <a:lnT w="9525">
+                      <a:solidFill>
+                        <a:srgbClr val="CBDDD6"/>
+                      </a:solidFill>
+                      <a:prstDash val="solid"/>
+                    </a:lnT>
+                    <a:lnB w="9525">
+                      <a:solidFill>
+                        <a:srgbClr val="CBDDD6"/>
+                      </a:solidFill>
+                      <a:prstDash val="solid"/>
+                    </a:lnB>
+                    <a:solidFill>
+                      <a:srgbClr val="193E3A"/>
+                    </a:solidFill>
+                  </a:tcPr>
+                </a:tc>
+                <a:tc>
+                  <a:txBody>
+                    <a:bodyPr/>
+                    <a:lstStyle/>
+                    <a:p>
+                      <a:r>
+                        <a:rPr sz="1575" b="1">
+                          <a:solidFill>
+                            <a:srgbClr val="FFFFFF"/>
+                          </a:solidFill>
+                          <a:latin typeface="Arial"/>
+                          <a:ea typeface="Arial"/>
+                          <a:cs typeface="Arial"/>
+                        </a:rPr>
+                        <a:t>Ensemble</a:t>
                       </a:r>
                     </a:p>
                   </a:txBody>
@@ -10165,7 +10467,7 @@
                     <a:lstStyle/>
                     <a:p>
                       <a:r>
-                        <a:rPr sz="1725" b="0">
+                        <a:rPr sz="1575" b="0">
                           <a:solidFill>
                             <a:srgbClr val="193E3A"/>
                           </a:solidFill>
@@ -10207,7 +10509,7 @@
                     <a:lstStyle/>
                     <a:p>
                       <a:r>
-                        <a:rPr sz="1725" b="0">
+                        <a:rPr sz="1575" b="0">
                           <a:solidFill>
                             <a:srgbClr val="193E3A"/>
                           </a:solidFill>
@@ -10243,7 +10545,43 @@
                     <a:lstStyle/>
                     <a:p>
                       <a:r>
-                        <a:rPr sz="1725" b="0">
+                        <a:rPr sz="1575" b="0">
+                          <a:solidFill>
+                            <a:srgbClr val="193E3A"/>
+                          </a:solidFill>
+                          <a:latin typeface="Arial"/>
+                          <a:ea typeface="Arial"/>
+                          <a:cs typeface="Arial"/>
+                        </a:rPr>
+                        <a:t>89,16%</a:t>
+                      </a:r>
+                    </a:p>
+                  </a:txBody>
+                  <a:tcPr marL="91440" marR="91440" marT="45720" marB="45720">
+                    <a:lnR w="9525">
+                      <a:solidFill>
+                        <a:srgbClr val="CBDDD6"/>
+                      </a:solidFill>
+                      <a:prstDash val="solid"/>
+                    </a:lnR>
+                    <a:lnB w="9525">
+                      <a:solidFill>
+                        <a:srgbClr val="CBDDD6"/>
+                      </a:solidFill>
+                      <a:prstDash val="solid"/>
+                    </a:lnB>
+                    <a:solidFill>
+                      <a:srgbClr val="FFFFFF"/>
+                    </a:solidFill>
+                  </a:tcPr>
+                </a:tc>
+                <a:tc>
+                  <a:txBody>
+                    <a:bodyPr/>
+                    <a:lstStyle/>
+                    <a:p>
+                      <a:r>
+                        <a:rPr sz="1575" b="0">
                           <a:solidFill>
                             <a:srgbClr val="193E3A"/>
                           </a:solidFill>
@@ -10281,7 +10619,7 @@
                     <a:lstStyle/>
                     <a:p>
                       <a:r>
-                        <a:rPr sz="1725" b="0">
+                        <a:rPr sz="1575" b="0">
                           <a:solidFill>
                             <a:srgbClr val="193E3A"/>
                           </a:solidFill>
@@ -10323,7 +10661,7 @@
                     <a:lstStyle/>
                     <a:p>
                       <a:r>
-                        <a:rPr sz="1725" b="0">
+                        <a:rPr sz="1575" b="0">
                           <a:solidFill>
                             <a:srgbClr val="193E3A"/>
                           </a:solidFill>
@@ -10359,7 +10697,43 @@
                     <a:lstStyle/>
                     <a:p>
                       <a:r>
-                        <a:rPr sz="1725" b="0">
+                        <a:rPr sz="1575" b="0">
+                          <a:solidFill>
+                            <a:srgbClr val="193E3A"/>
+                          </a:solidFill>
+                          <a:latin typeface="Arial"/>
+                          <a:ea typeface="Arial"/>
+                          <a:cs typeface="Arial"/>
+                        </a:rPr>
+                        <a:t>87,74%</a:t>
+                      </a:r>
+                    </a:p>
+                  </a:txBody>
+                  <a:tcPr marL="91440" marR="91440" marT="45720" marB="45720">
+                    <a:lnR w="9525">
+                      <a:solidFill>
+                        <a:srgbClr val="CBDDD6"/>
+                      </a:solidFill>
+                      <a:prstDash val="solid"/>
+                    </a:lnR>
+                    <a:lnB w="9525">
+                      <a:solidFill>
+                        <a:srgbClr val="CBDDD6"/>
+                      </a:solidFill>
+                      <a:prstDash val="solid"/>
+                    </a:lnB>
+                    <a:solidFill>
+                      <a:srgbClr val="E9F3EE"/>
+                    </a:solidFill>
+                  </a:tcPr>
+                </a:tc>
+                <a:tc>
+                  <a:txBody>
+                    <a:bodyPr/>
+                    <a:lstStyle/>
+                    <a:p>
+                      <a:r>
+                        <a:rPr sz="1575" b="0">
                           <a:solidFill>
                             <a:srgbClr val="193E3A"/>
                           </a:solidFill>
@@ -10397,7 +10771,7 @@
                     <a:lstStyle/>
                     <a:p>
                       <a:r>
-                        <a:rPr sz="1725" b="0">
+                        <a:rPr sz="1575" b="0">
                           <a:solidFill>
                             <a:srgbClr val="193E3A"/>
                           </a:solidFill>
@@ -10439,7 +10813,7 @@
                     <a:lstStyle/>
                     <a:p>
                       <a:r>
-                        <a:rPr sz="1725" b="0">
+                        <a:rPr sz="1575" b="0">
                           <a:solidFill>
                             <a:srgbClr val="193E3A"/>
                           </a:solidFill>
@@ -10475,7 +10849,43 @@
                     <a:lstStyle/>
                     <a:p>
                       <a:r>
-                        <a:rPr sz="1725" b="0">
+                        <a:rPr sz="1575" b="0">
+                          <a:solidFill>
+                            <a:srgbClr val="193E3A"/>
+                          </a:solidFill>
+                          <a:latin typeface="Arial"/>
+                          <a:ea typeface="Arial"/>
+                          <a:cs typeface="Arial"/>
+                        </a:rPr>
+                        <a:t>96,12%</a:t>
+                      </a:r>
+                    </a:p>
+                  </a:txBody>
+                  <a:tcPr marL="91440" marR="91440" marT="45720" marB="45720">
+                    <a:lnR w="9525">
+                      <a:solidFill>
+                        <a:srgbClr val="CBDDD6"/>
+                      </a:solidFill>
+                      <a:prstDash val="solid"/>
+                    </a:lnR>
+                    <a:lnB w="9525">
+                      <a:solidFill>
+                        <a:srgbClr val="CBDDD6"/>
+                      </a:solidFill>
+                      <a:prstDash val="solid"/>
+                    </a:lnB>
+                    <a:solidFill>
+                      <a:srgbClr val="FFFFFF"/>
+                    </a:solidFill>
+                  </a:tcPr>
+                </a:tc>
+                <a:tc>
+                  <a:txBody>
+                    <a:bodyPr/>
+                    <a:lstStyle/>
+                    <a:p>
+                      <a:r>
+                        <a:rPr sz="1575" b="0">
                           <a:solidFill>
                             <a:srgbClr val="193E3A"/>
                           </a:solidFill>
@@ -10513,7 +10923,7 @@
                     <a:lstStyle/>
                     <a:p>
                       <a:r>
-                        <a:rPr sz="1725" b="0">
+                        <a:rPr sz="1575" b="0">
                           <a:solidFill>
                             <a:srgbClr val="193E3A"/>
                           </a:solidFill>
@@ -10555,7 +10965,7 @@
                     <a:lstStyle/>
                     <a:p>
                       <a:r>
-                        <a:rPr sz="1725" b="0">
+                        <a:rPr sz="1575" b="0">
                           <a:solidFill>
                             <a:srgbClr val="193E3A"/>
                           </a:solidFill>
@@ -10591,7 +11001,43 @@
                     <a:lstStyle/>
                     <a:p>
                       <a:r>
-                        <a:rPr sz="1725" b="0">
+                        <a:rPr sz="1575" b="0">
+                          <a:solidFill>
+                            <a:srgbClr val="193E3A"/>
+                          </a:solidFill>
+                          <a:latin typeface="Arial"/>
+                          <a:ea typeface="Arial"/>
+                          <a:cs typeface="Arial"/>
+                        </a:rPr>
+                        <a:t>77,49%</a:t>
+                      </a:r>
+                    </a:p>
+                  </a:txBody>
+                  <a:tcPr marL="91440" marR="91440" marT="45720" marB="45720">
+                    <a:lnR w="9525">
+                      <a:solidFill>
+                        <a:srgbClr val="CBDDD6"/>
+                      </a:solidFill>
+                      <a:prstDash val="solid"/>
+                    </a:lnR>
+                    <a:lnB w="9525">
+                      <a:solidFill>
+                        <a:srgbClr val="CBDDD6"/>
+                      </a:solidFill>
+                      <a:prstDash val="solid"/>
+                    </a:lnB>
+                    <a:solidFill>
+                      <a:srgbClr val="E9F3EE"/>
+                    </a:solidFill>
+                  </a:tcPr>
+                </a:tc>
+                <a:tc>
+                  <a:txBody>
+                    <a:bodyPr/>
+                    <a:lstStyle/>
+                    <a:p>
+                      <a:r>
+                        <a:rPr sz="1575" b="0">
                           <a:solidFill>
                             <a:srgbClr val="193E3A"/>
                           </a:solidFill>
@@ -10629,7 +11075,7 @@
                     <a:lstStyle/>
                     <a:p>
                       <a:r>
-                        <a:rPr sz="1725" b="0">
+                        <a:rPr sz="1575" b="0">
                           <a:solidFill>
                             <a:srgbClr val="193E3A"/>
                           </a:solidFill>
@@ -10671,7 +11117,7 @@
                     <a:lstStyle/>
                     <a:p>
                       <a:r>
-                        <a:rPr sz="1725" b="0">
+                        <a:rPr sz="1575" b="0">
                           <a:solidFill>
                             <a:srgbClr val="193E3A"/>
                           </a:solidFill>
@@ -10707,7 +11153,43 @@
                     <a:lstStyle/>
                     <a:p>
                       <a:r>
-                        <a:rPr sz="1725" b="0">
+                        <a:rPr sz="1575" b="0">
+                          <a:solidFill>
+                            <a:srgbClr val="193E3A"/>
+                          </a:solidFill>
+                          <a:latin typeface="Arial"/>
+                          <a:ea typeface="Arial"/>
+                          <a:cs typeface="Arial"/>
+                        </a:rPr>
+                        <a:t>0,9174</a:t>
+                      </a:r>
+                    </a:p>
+                  </a:txBody>
+                  <a:tcPr marL="91440" marR="91440" marT="45720" marB="45720">
+                    <a:lnR w="9525">
+                      <a:solidFill>
+                        <a:srgbClr val="CBDDD6"/>
+                      </a:solidFill>
+                      <a:prstDash val="solid"/>
+                    </a:lnR>
+                    <a:lnB w="9525">
+                      <a:solidFill>
+                        <a:srgbClr val="CBDDD6"/>
+                      </a:solidFill>
+                      <a:prstDash val="solid"/>
+                    </a:lnB>
+                    <a:solidFill>
+                      <a:srgbClr val="FFFFFF"/>
+                    </a:solidFill>
+                  </a:tcPr>
+                </a:tc>
+                <a:tc>
+                  <a:txBody>
+                    <a:bodyPr/>
+                    <a:lstStyle/>
+                    <a:p>
+                      <a:r>
+                        <a:rPr sz="1575" b="0">
                           <a:solidFill>
                             <a:srgbClr val="193E3A"/>
                           </a:solidFill>
@@ -10745,7 +11227,7 @@
                     <a:lstStyle/>
                     <a:p>
                       <a:r>
-                        <a:rPr sz="1725" b="0">
+                        <a:rPr sz="1575" b="0">
                           <a:solidFill>
                             <a:srgbClr val="193E3A"/>
                           </a:solidFill>
@@ -10787,7 +11269,7 @@
                     <a:lstStyle/>
                     <a:p>
                       <a:r>
-                        <a:rPr sz="1725" b="0">
+                        <a:rPr sz="1575" b="0">
                           <a:solidFill>
                             <a:srgbClr val="193E3A"/>
                           </a:solidFill>
@@ -10823,7 +11305,7 @@
                     <a:lstStyle/>
                     <a:p>
                       <a:r>
-                        <a:rPr sz="1725" b="0">
+                        <a:rPr sz="1575" b="0">
                           <a:solidFill>
                             <a:srgbClr val="193E3A"/>
                           </a:solidFill>
@@ -10832,6 +11314,42 @@
                           <a:cs typeface="Arial"/>
                         </a:rPr>
                         <a:t>0,9581</a:t>
+                      </a:r>
+                    </a:p>
+                  </a:txBody>
+                  <a:tcPr marL="91440" marR="91440" marT="45720" marB="45720">
+                    <a:lnR w="9525">
+                      <a:solidFill>
+                        <a:srgbClr val="CBDDD6"/>
+                      </a:solidFill>
+                      <a:prstDash val="solid"/>
+                    </a:lnR>
+                    <a:lnB w="9525">
+                      <a:solidFill>
+                        <a:srgbClr val="CBDDD6"/>
+                      </a:solidFill>
+                      <a:prstDash val="solid"/>
+                    </a:lnB>
+                    <a:solidFill>
+                      <a:srgbClr val="E9F3EE"/>
+                    </a:solidFill>
+                  </a:tcPr>
+                </a:tc>
+                <a:tc>
+                  <a:txBody>
+                    <a:bodyPr/>
+                    <a:lstStyle/>
+                    <a:p>
+                      <a:r>
+                        <a:rPr sz="1575" b="0">
+                          <a:solidFill>
+                            <a:srgbClr val="193E3A"/>
+                          </a:solidFill>
+                          <a:latin typeface="Arial"/>
+                          <a:ea typeface="Arial"/>
+                          <a:cs typeface="Arial"/>
+                        </a:rPr>
+                        <a:t>0,9583</a:t>
                       </a:r>
                     </a:p>
                   </a:txBody>
@@ -11227,7 +11745,7 @@
                 <a:ea typeface="Arial"/>
                 <a:cs typeface="Arial"/>
               </a:rPr>
-              <a:t>Бір сурет және екі модель</a:t>
+              <a:t>Бір сурет және үш болжам</a:t>
             </a:r>
           </a:p>
         </p:txBody>
@@ -11306,7 +11824,7 @@
           <p:cNvPr id="3" name="">
             <a:extLst xmlns:a="http://schemas.openxmlformats.org/drawingml/2006/main">
               <a:ext uri="{FF2B5EF4-FFF2-40B4-BE49-F238E27FC236}">
-                <a16:creationId xmlns:a16="http://schemas.microsoft.com/office/drawing/2014/main" id="{889621C8-30E2-4672-9413-2F2A6A04C086}"/>
+                <a16:creationId xmlns:a16="http://schemas.microsoft.com/office/drawing/2014/main" id="{EC4C0078-F1F0-4CF1-8B19-81DBB315FD99}"/>
               </a:ext>
             </a:extLst>
           </p:cNvPr>
@@ -11316,7 +11834,7 @@
           <p:nvPr/>
         </p:nvPicPr>
         <p:blipFill>
-          <a:blip xmlns:r="http://schemas.openxmlformats.org/officeDocument/2006/relationships" xmlns:a="http://schemas.openxmlformats.org/drawingml/2006/main" r:embed="Ra4f547400dda46cc"/>
+          <a:blip xmlns:r="http://schemas.openxmlformats.org/officeDocument/2006/relationships" xmlns:a="http://schemas.openxmlformats.org/drawingml/2006/main" r:embed="Rcc5a2091772d4a0e"/>
           <a:stretch xmlns:a="http://schemas.openxmlformats.org/drawingml/2006/main"/>
         </p:blipFill>
         <p:spPr>
@@ -11849,7 +12367,7 @@
           <p:cNvPr id="3" name="">
             <a:extLst xmlns:a="http://schemas.openxmlformats.org/drawingml/2006/main">
               <a:ext uri="{FF2B5EF4-FFF2-40B4-BE49-F238E27FC236}">
-                <a16:creationId xmlns:a16="http://schemas.microsoft.com/office/drawing/2014/main" id="{97B6F7E9-331C-44CA-AEAE-E127888CA0AA}"/>
+                <a16:creationId xmlns:a16="http://schemas.microsoft.com/office/drawing/2014/main" id="{A3F02817-160A-44AC-B501-A3BDE9DFE7E3}"/>
               </a:ext>
             </a:extLst>
           </p:cNvPr>
@@ -11859,7 +12377,7 @@
           <p:nvPr/>
         </p:nvPicPr>
         <p:blipFill>
-          <a:blip xmlns:r="http://schemas.openxmlformats.org/officeDocument/2006/relationships" xmlns:a="http://schemas.openxmlformats.org/drawingml/2006/main" r:embed="Re8c1dcefbfc349cc"/>
+          <a:blip xmlns:r="http://schemas.openxmlformats.org/officeDocument/2006/relationships" xmlns:a="http://schemas.openxmlformats.org/drawingml/2006/main" r:embed="R5718f91a63374204"/>
           <a:stretch xmlns:a="http://schemas.openxmlformats.org/drawingml/2006/main"/>
         </p:blipFill>
         <p:spPr>
@@ -12323,7 +12841,7 @@
           <p:cNvPr id="3" name="">
             <a:extLst xmlns:a="http://schemas.openxmlformats.org/drawingml/2006/main">
               <a:ext uri="{FF2B5EF4-FFF2-40B4-BE49-F238E27FC236}">
-                <a16:creationId xmlns:a16="http://schemas.microsoft.com/office/drawing/2014/main" id="{CE93AABE-DCB3-45F9-B88F-812A13E2A2C7}"/>
+                <a16:creationId xmlns:a16="http://schemas.microsoft.com/office/drawing/2014/main" id="{BB1D2741-EF95-4683-8380-AA884B39168A}"/>
               </a:ext>
             </a:extLst>
           </p:cNvPr>
@@ -12333,7 +12851,7 @@
           <p:nvPr/>
         </p:nvPicPr>
         <p:blipFill>
-          <a:blip xmlns:r="http://schemas.openxmlformats.org/officeDocument/2006/relationships" xmlns:a="http://schemas.openxmlformats.org/drawingml/2006/main" r:embed="R2887cf7f91c14c9e"/>
+          <a:blip xmlns:r="http://schemas.openxmlformats.org/officeDocument/2006/relationships" xmlns:a="http://schemas.openxmlformats.org/drawingml/2006/main" r:embed="R6e97e4b68b614603"/>
           <a:stretch xmlns:a="http://schemas.openxmlformats.org/drawingml/2006/main"/>
         </p:blipFill>
         <p:spPr>
@@ -12351,7 +12869,7 @@
           <p:cNvPr id="4" name="">
             <a:extLst xmlns:a="http://schemas.openxmlformats.org/drawingml/2006/main">
               <a:ext uri="{FF2B5EF4-FFF2-40B4-BE49-F238E27FC236}">
-                <a16:creationId xmlns:a16="http://schemas.microsoft.com/office/drawing/2014/main" id="{E201A30C-9F54-4E1C-9449-7697B8144189}"/>
+                <a16:creationId xmlns:a16="http://schemas.microsoft.com/office/drawing/2014/main" id="{4E447657-A80A-4CA7-AB18-E2BEB98F31FC}"/>
               </a:ext>
             </a:extLst>
           </p:cNvPr>
@@ -12361,7 +12879,7 @@
           <p:nvPr/>
         </p:nvPicPr>
         <p:blipFill>
-          <a:blip xmlns:r="http://schemas.openxmlformats.org/officeDocument/2006/relationships" xmlns:a="http://schemas.openxmlformats.org/drawingml/2006/main" r:embed="Rbfefb9a7013b46cb"/>
+          <a:blip xmlns:r="http://schemas.openxmlformats.org/officeDocument/2006/relationships" xmlns:a="http://schemas.openxmlformats.org/drawingml/2006/main" r:embed="R15fc9e56a24c4c83"/>
           <a:stretch xmlns:a="http://schemas.openxmlformats.org/drawingml/2006/main"/>
         </p:blipFill>
         <p:spPr>
